--- a/Object-Following-Robot-Presentation.pptx
+++ b/Object-Following-Robot-Presentation.pptx
@@ -17,6 +17,7 @@
     <p:sldId id="265" r:id="rId16"/>
     <p:sldId id="266" r:id="rId17"/>
     <p:sldId id="267" r:id="rId18"/>
+    <p:sldId id="268" r:id="rId19"/>
   </p:sldIdLst>
   <p:sldSz cx="12191695" cy="6858000" type="screen4x3"/>
   <p:notesSz cx="6858000" cy="9144000"/>
@@ -3101,14 +3102,81 @@
       <p:grpSpPr/>
       <p:sp>
         <p:nvSpPr>
-          <p:cNvPr id="2" name="TextBox 1"/>
+          <p:cNvPr id="2" name="Rectangle 1"/>
+          <p:cNvSpPr/>
+          <p:nvPr/>
+        </p:nvSpPr>
+        <p:spPr>
+          <a:xfrm>
+            <a:off x="0" y="0"/>
+            <a:ext cx="365760" cy="6858000"/>
+          </a:xfrm>
+          <a:prstGeom prst="rect">
+            <a:avLst/>
+          </a:prstGeom>
+          <a:solidFill>
+            <a:srgbClr val="1A365D"/>
+          </a:solidFill>
+          <a:ln>
+            <a:noFill/>
+          </a:ln>
+        </p:spPr>
+        <p:style>
+          <a:lnRef idx="1">
+            <a:schemeClr val="accent1"/>
+          </a:lnRef>
+          <a:fillRef idx="3">
+            <a:schemeClr val="accent1"/>
+          </a:fillRef>
+          <a:effectRef idx="2">
+            <a:schemeClr val="accent1"/>
+          </a:effectRef>
+          <a:fontRef idx="minor">
+            <a:schemeClr val="lt1"/>
+          </a:fontRef>
+        </p:style>
+        <p:txBody>
+          <a:bodyPr rtlCol="0" anchor="ctr"/>
+          <a:lstStyle/>
+          <a:p>
+            <a:pPr algn="ctr"/>
+          </a:p>
+        </p:txBody>
+      </p:sp>
+      <p:pic>
+        <p:nvPicPr>
+          <p:cNvPr id="3" name="Picture 2" descr="CGEC-Logo-colorful.jpg"/>
+          <p:cNvPicPr>
+            <a:picLocks noChangeAspect="1"/>
+          </p:cNvPicPr>
+          <p:nvPr/>
+        </p:nvPicPr>
+        <p:blipFill>
+          <a:blip r:embed="rId2"/>
+          <a:stretch>
+            <a:fillRect/>
+          </a:stretch>
+        </p:blipFill>
+        <p:spPr>
+          <a:xfrm>
+            <a:off x="9418320" y="1097280"/>
+            <a:ext cx="1645920" cy="1645920"/>
+          </a:xfrm>
+          <a:prstGeom prst="rect">
+            <a:avLst/>
+          </a:prstGeom>
+        </p:spPr>
+      </p:pic>
+      <p:sp>
+        <p:nvSpPr>
+          <p:cNvPr id="4" name="TextBox 3"/>
           <p:cNvSpPr txBox="1"/>
           <p:nvPr/>
         </p:nvSpPr>
         <p:spPr>
           <a:xfrm>
-            <a:off x="914400" y="1097280"/>
-            <a:ext cx="10332720" cy="4572000"/>
+            <a:off x="1097280" y="1097280"/>
+            <a:ext cx="8046720" cy="4572000"/>
           </a:xfrm>
           <a:prstGeom prst="rect">
             <a:avLst/>
@@ -3280,7 +3348,7 @@
               </a:defRPr>
             </a:pPr>
             <a:r>
-              <a:t>8. Calibration &amp; Experimental Results</a:t>
+              <a:t>8. Calibration &amp; Integration</a:t>
             </a:r>
           </a:p>
         </p:txBody>
@@ -3303,9 +3371,7 @@
             <a:srgbClr val="1A365D"/>
           </a:solidFill>
           <a:ln>
-            <a:solidFill>
-              <a:srgbClr val="1A365D"/>
-            </a:solidFill>
+            <a:noFill/>
           </a:ln>
         </p:spPr>
         <p:style>
@@ -3348,9 +3414,7 @@
             <a:srgbClr val="DCDCDC"/>
           </a:solidFill>
           <a:ln>
-            <a:solidFill>
-              <a:srgbClr val="DCDCDC"/>
-            </a:solidFill>
+            <a:noFill/>
           </a:ln>
         </p:spPr>
         <p:style>
@@ -3442,21 +3506,64 @@
               </a:defRPr>
             </a:pPr>
             <a:r>
-              <a:t>Slide 9 of 11</a:t>
-            </a:r>
-          </a:p>
-        </p:txBody>
-      </p:sp>
-      <p:sp>
-        <p:nvSpPr>
-          <p:cNvPr id="7" name="TextBox 6"/>
+              <a:t>Slide 9 of 12</a:t>
+            </a:r>
+          </a:p>
+        </p:txBody>
+      </p:sp>
+      <p:sp>
+        <p:nvSpPr>
+          <p:cNvPr id="7" name="Rectangle 6"/>
+          <p:cNvSpPr/>
+          <p:nvPr/>
+        </p:nvSpPr>
+        <p:spPr>
+          <a:xfrm>
+            <a:off x="914400" y="1645920"/>
+            <a:ext cx="4663440" cy="4114800"/>
+          </a:xfrm>
+          <a:prstGeom prst="rect">
+            <a:avLst/>
+          </a:prstGeom>
+          <a:solidFill>
+            <a:srgbClr val="F8FAFC"/>
+          </a:solidFill>
+          <a:ln>
+            <a:noFill/>
+          </a:ln>
+        </p:spPr>
+        <p:style>
+          <a:lnRef idx="1">
+            <a:schemeClr val="accent1"/>
+          </a:lnRef>
+          <a:fillRef idx="3">
+            <a:schemeClr val="accent1"/>
+          </a:fillRef>
+          <a:effectRef idx="2">
+            <a:schemeClr val="accent1"/>
+          </a:effectRef>
+          <a:fontRef idx="minor">
+            <a:schemeClr val="lt1"/>
+          </a:fontRef>
+        </p:style>
+        <p:txBody>
+          <a:bodyPr rtlCol="0" anchor="ctr"/>
+          <a:lstStyle/>
+          <a:p>
+            <a:pPr algn="ctr"/>
+          </a:p>
+        </p:txBody>
+      </p:sp>
+      <p:sp>
+        <p:nvSpPr>
+          <p:cNvPr id="8" name="TextBox 7"/>
           <p:cNvSpPr txBox="1"/>
           <p:nvPr/>
         </p:nvSpPr>
         <p:spPr>
           <a:xfrm>
-            <a:off x="914400" y="1645920"/>
-            <a:ext cx="4754880" cy="4114800"/>
+            <a:off x="1051560" y="1783080"/>
+            <a:ext cx="4389120" cy="3840480"/>
           </a:xfrm>
           <a:prstGeom prst="rect">
             <a:avLst/>
@@ -3473,7 +3580,7 @@
               <a:spcAft>
                 <a:spcPts val="200"/>
               </a:spcAft>
-              <a:defRPr sz="1300" b="1">
+              <a:defRPr sz="1250" b="1">
                 <a:solidFill>
                   <a:srgbClr val="1A365D"/>
                 </a:solidFill>
@@ -3487,9 +3594,9 @@
           <a:p>
             <a:pPr>
               <a:spcAft>
-                <a:spcPts val="1800"/>
-              </a:spcAft>
-              <a:defRPr sz="1100">
+                <a:spcPts val="1200"/>
+              </a:spcAft>
+              <a:defRPr sz="1050">
                 <a:solidFill>
                   <a:srgbClr val="282828"/>
                 </a:solidFill>
@@ -3505,7 +3612,7 @@
               <a:spcAft>
                 <a:spcPts val="200"/>
               </a:spcAft>
-              <a:defRPr sz="1300" b="1">
+              <a:defRPr sz="1250" b="1">
                 <a:solidFill>
                   <a:srgbClr val="1A365D"/>
                 </a:solidFill>
@@ -3519,9 +3626,9 @@
           <a:p>
             <a:pPr>
               <a:spcAft>
-                <a:spcPts val="1800"/>
-              </a:spcAft>
-              <a:defRPr sz="1100">
+                <a:spcPts val="1200"/>
+              </a:spcAft>
+              <a:defRPr sz="1050">
                 <a:solidFill>
                   <a:srgbClr val="282828"/>
                 </a:solidFill>
@@ -3541,6 +3648,14 @@
             </a:r>
             <a:br/>
             <a:r>
+              <a:t>- Left IR detection: Pivot Left</a:t>
+            </a:r>
+            <a:br/>
+            <a:r>
+              <a:t>- Right IR detection: Pivot Right</a:t>
+            </a:r>
+            <a:br/>
+            <a:r>
               <a:t>- Over 35 cm: Target lost, enter Search pivot</a:t>
             </a:r>
           </a:p>
@@ -3549,7 +3664,7 @@
               <a:spcAft>
                 <a:spcPts val="200"/>
               </a:spcAft>
-              <a:defRPr sz="1300" b="1">
+              <a:defRPr sz="1250" b="1">
                 <a:solidFill>
                   <a:srgbClr val="1A365D"/>
                 </a:solidFill>
@@ -3563,9 +3678,9 @@
           <a:p>
             <a:pPr>
               <a:spcAft>
-                <a:spcPts val="1800"/>
-              </a:spcAft>
-              <a:defRPr sz="1100">
+                <a:spcPts val="1200"/>
+              </a:spcAft>
+              <a:defRPr sz="1050">
                 <a:solidFill>
                   <a:srgbClr val="282828"/>
                 </a:solidFill>
@@ -3580,7 +3695,7 @@
       </p:sp>
       <p:pic>
         <p:nvPicPr>
-          <p:cNvPr id="8" name="Picture 7" descr="img1.jpeg"/>
+          <p:cNvPr id="9" name="Picture 8" descr="img1.jpeg"/>
           <p:cNvPicPr>
             <a:picLocks noChangeAspect="1"/>
           </p:cNvPicPr>
@@ -3594,8 +3709,8 @@
         </p:blipFill>
         <p:spPr>
           <a:xfrm>
-            <a:off x="6217920" y="1645920"/>
-            <a:ext cx="5029200" cy="4023360"/>
+            <a:off x="7269480" y="1691640"/>
+            <a:ext cx="3017520" cy="4023360"/>
           </a:xfrm>
           <a:prstGeom prst="rect">
             <a:avLst/>
@@ -3674,9 +3789,7 @@
             <a:srgbClr val="1A365D"/>
           </a:solidFill>
           <a:ln>
-            <a:solidFill>
-              <a:srgbClr val="1A365D"/>
-            </a:solidFill>
+            <a:noFill/>
           </a:ln>
         </p:spPr>
         <p:style>
@@ -3719,9 +3832,7 @@
             <a:srgbClr val="DCDCDC"/>
           </a:solidFill>
           <a:ln>
-            <a:solidFill>
-              <a:srgbClr val="DCDCDC"/>
-            </a:solidFill>
+            <a:noFill/>
           </a:ln>
         </p:spPr>
         <p:style>
@@ -3813,21 +3924,64 @@
               </a:defRPr>
             </a:pPr>
             <a:r>
-              <a:t>Slide 10 of 11</a:t>
-            </a:r>
-          </a:p>
-        </p:txBody>
-      </p:sp>
-      <p:sp>
-        <p:nvSpPr>
-          <p:cNvPr id="7" name="TextBox 6"/>
+              <a:t>Slide 10 of 12</a:t>
+            </a:r>
+          </a:p>
+        </p:txBody>
+      </p:sp>
+      <p:sp>
+        <p:nvSpPr>
+          <p:cNvPr id="7" name="Rectangle 6"/>
+          <p:cNvSpPr/>
+          <p:nvPr/>
+        </p:nvSpPr>
+        <p:spPr>
+          <a:xfrm>
+            <a:off x="914400" y="1645920"/>
+            <a:ext cx="4663440" cy="4114800"/>
+          </a:xfrm>
+          <a:prstGeom prst="rect">
+            <a:avLst/>
+          </a:prstGeom>
+          <a:solidFill>
+            <a:srgbClr val="F8FAFC"/>
+          </a:solidFill>
+          <a:ln>
+            <a:noFill/>
+          </a:ln>
+        </p:spPr>
+        <p:style>
+          <a:lnRef idx="1">
+            <a:schemeClr val="accent1"/>
+          </a:lnRef>
+          <a:fillRef idx="3">
+            <a:schemeClr val="accent1"/>
+          </a:fillRef>
+          <a:effectRef idx="2">
+            <a:schemeClr val="accent1"/>
+          </a:effectRef>
+          <a:fontRef idx="minor">
+            <a:schemeClr val="lt1"/>
+          </a:fontRef>
+        </p:style>
+        <p:txBody>
+          <a:bodyPr rtlCol="0" anchor="ctr"/>
+          <a:lstStyle/>
+          <a:p>
+            <a:pPr algn="ctr"/>
+          </a:p>
+        </p:txBody>
+      </p:sp>
+      <p:sp>
+        <p:nvSpPr>
+          <p:cNvPr id="8" name="TextBox 7"/>
           <p:cNvSpPr txBox="1"/>
           <p:nvPr/>
         </p:nvSpPr>
         <p:spPr>
           <a:xfrm>
-            <a:off x="914400" y="1645920"/>
-            <a:ext cx="4754880" cy="4114800"/>
+            <a:off x="1051560" y="1783080"/>
+            <a:ext cx="4389120" cy="3840480"/>
           </a:xfrm>
           <a:prstGeom prst="rect">
             <a:avLst/>
@@ -3844,7 +3998,7 @@
               <a:spcAft>
                 <a:spcPts val="200"/>
               </a:spcAft>
-              <a:defRPr sz="1300" b="1">
+              <a:defRPr sz="1250" b="1">
                 <a:solidFill>
                   <a:srgbClr val="1A365D"/>
                 </a:solidFill>
@@ -3852,15 +4006,15 @@
               </a:defRPr>
             </a:pPr>
             <a:r>
-              <a:t>Tracking Reliability</a:t>
-            </a:r>
-          </a:p>
-          <a:p>
-            <a:pPr>
-              <a:spcAft>
-                <a:spcPts val="1800"/>
-              </a:spcAft>
-              <a:defRPr sz="1100">
+              <a:t>Target Tracking Reliability</a:t>
+            </a:r>
+          </a:p>
+          <a:p>
+            <a:pPr>
+              <a:spcAft>
+                <a:spcPts val="1400"/>
+              </a:spcAft>
+              <a:defRPr sz="1050">
                 <a:solidFill>
                   <a:srgbClr val="282828"/>
                 </a:solidFill>
@@ -3876,7 +4030,7 @@
               <a:spcAft>
                 <a:spcPts val="200"/>
               </a:spcAft>
-              <a:defRPr sz="1300" b="1">
+              <a:defRPr sz="1250" b="1">
                 <a:solidFill>
                   <a:srgbClr val="1A365D"/>
                 </a:solidFill>
@@ -3890,9 +4044,9 @@
           <a:p>
             <a:pPr>
               <a:spcAft>
-                <a:spcPts val="1800"/>
-              </a:spcAft>
-              <a:defRPr sz="1100">
+                <a:spcPts val="1400"/>
+              </a:spcAft>
+              <a:defRPr sz="1050">
                 <a:solidFill>
                   <a:srgbClr val="282828"/>
                 </a:solidFill>
@@ -3908,7 +4062,7 @@
               <a:spcAft>
                 <a:spcPts val="200"/>
               </a:spcAft>
-              <a:defRPr sz="1300" b="1">
+              <a:defRPr sz="1250" b="1">
                 <a:solidFill>
                   <a:srgbClr val="1A365D"/>
                 </a:solidFill>
@@ -3922,9 +4076,9 @@
           <a:p>
             <a:pPr>
               <a:spcAft>
-                <a:spcPts val="1800"/>
-              </a:spcAft>
-              <a:defRPr sz="1100">
+                <a:spcPts val="1400"/>
+              </a:spcAft>
+              <a:defRPr sz="1050">
                 <a:solidFill>
                   <a:srgbClr val="282828"/>
                 </a:solidFill>
@@ -3939,7 +4093,7 @@
       </p:sp>
       <p:pic>
         <p:nvPicPr>
-          <p:cNvPr id="8" name="Picture 7" descr="img3.jpeg"/>
+          <p:cNvPr id="9" name="Picture 8" descr="img3.jpeg"/>
           <p:cNvPicPr>
             <a:picLocks noChangeAspect="1"/>
           </p:cNvPicPr>
@@ -3953,8 +4107,32 @@
         </p:blipFill>
         <p:spPr>
           <a:xfrm>
-            <a:off x="6217920" y="1645920"/>
-            <a:ext cx="5029200" cy="4023360"/>
+            <a:off x="6309360" y="2112264"/>
+            <a:ext cx="2377440" cy="3172968"/>
+          </a:xfrm>
+          <a:prstGeom prst="rect">
+            <a:avLst/>
+          </a:prstGeom>
+        </p:spPr>
+      </p:pic>
+      <p:pic>
+        <p:nvPicPr>
+          <p:cNvPr id="10" name="Picture 9" descr="img4.jpeg"/>
+          <p:cNvPicPr>
+            <a:picLocks noChangeAspect="1"/>
+          </p:cNvPicPr>
+          <p:nvPr/>
+        </p:nvPicPr>
+        <p:blipFill>
+          <a:blip r:embed="rId3"/>
+          <a:stretch>
+            <a:fillRect/>
+          </a:stretch>
+        </p:blipFill>
+        <p:spPr>
+          <a:xfrm>
+            <a:off x="8869680" y="2807208"/>
+            <a:ext cx="2377440" cy="1783080"/>
           </a:xfrm>
           <a:prstGeom prst="rect">
             <a:avLst/>
@@ -4010,7 +4188,7 @@
               </a:defRPr>
             </a:pPr>
             <a:r>
-              <a:t>10. Conclusions &amp; Future Scope</a:t>
+              <a:t>10. Conclusions</a:t>
             </a:r>
           </a:p>
         </p:txBody>
@@ -4033,9 +4211,7 @@
             <a:srgbClr val="1A365D"/>
           </a:solidFill>
           <a:ln>
-            <a:solidFill>
-              <a:srgbClr val="1A365D"/>
-            </a:solidFill>
+            <a:noFill/>
           </a:ln>
         </p:spPr>
         <p:style>
@@ -4078,9 +4254,7 @@
             <a:srgbClr val="DCDCDC"/>
           </a:solidFill>
           <a:ln>
-            <a:solidFill>
-              <a:srgbClr val="DCDCDC"/>
-            </a:solidFill>
+            <a:noFill/>
           </a:ln>
         </p:spPr>
         <p:style>
@@ -4172,21 +4346,64 @@
               </a:defRPr>
             </a:pPr>
             <a:r>
-              <a:t>Slide 11 of 11</a:t>
-            </a:r>
-          </a:p>
-        </p:txBody>
-      </p:sp>
-      <p:sp>
-        <p:nvSpPr>
-          <p:cNvPr id="7" name="TextBox 6"/>
+              <a:t>Slide 11 of 12</a:t>
+            </a:r>
+          </a:p>
+        </p:txBody>
+      </p:sp>
+      <p:sp>
+        <p:nvSpPr>
+          <p:cNvPr id="7" name="Rectangle 6"/>
+          <p:cNvSpPr/>
+          <p:nvPr/>
+        </p:nvSpPr>
+        <p:spPr>
+          <a:xfrm>
+            <a:off x="914400" y="1645920"/>
+            <a:ext cx="4663440" cy="4114800"/>
+          </a:xfrm>
+          <a:prstGeom prst="rect">
+            <a:avLst/>
+          </a:prstGeom>
+          <a:solidFill>
+            <a:srgbClr val="F8FAFC"/>
+          </a:solidFill>
+          <a:ln>
+            <a:noFill/>
+          </a:ln>
+        </p:spPr>
+        <p:style>
+          <a:lnRef idx="1">
+            <a:schemeClr val="accent1"/>
+          </a:lnRef>
+          <a:fillRef idx="3">
+            <a:schemeClr val="accent1"/>
+          </a:fillRef>
+          <a:effectRef idx="2">
+            <a:schemeClr val="accent1"/>
+          </a:effectRef>
+          <a:fontRef idx="minor">
+            <a:schemeClr val="lt1"/>
+          </a:fontRef>
+        </p:style>
+        <p:txBody>
+          <a:bodyPr rtlCol="0" anchor="ctr"/>
+          <a:lstStyle/>
+          <a:p>
+            <a:pPr algn="ctr"/>
+          </a:p>
+        </p:txBody>
+      </p:sp>
+      <p:sp>
+        <p:nvSpPr>
+          <p:cNvPr id="8" name="TextBox 7"/>
           <p:cNvSpPr txBox="1"/>
           <p:nvPr/>
         </p:nvSpPr>
         <p:spPr>
           <a:xfrm>
-            <a:off x="914400" y="1645920"/>
-            <a:ext cx="10332720" cy="4114800"/>
+            <a:off x="1051560" y="1783080"/>
+            <a:ext cx="4389120" cy="3840480"/>
           </a:xfrm>
           <a:prstGeom prst="rect">
             <a:avLst/>
@@ -4203,7 +4420,7 @@
               <a:spcAft>
                 <a:spcPts val="200"/>
               </a:spcAft>
-              <a:defRPr sz="1300" b="1">
+              <a:defRPr sz="1250" b="1">
                 <a:solidFill>
                   <a:srgbClr val="1A365D"/>
                 </a:solidFill>
@@ -4211,7 +4428,7 @@
               </a:defRPr>
             </a:pPr>
             <a:r>
-              <a:t>Successful System Realization</a:t>
+              <a:t>Successful Prototype Construction</a:t>
             </a:r>
           </a:p>
           <a:p>
@@ -4219,7 +4436,7 @@
               <a:spcAft>
                 <a:spcPts val="1600"/>
               </a:spcAft>
-              <a:defRPr sz="1100">
+              <a:defRPr sz="1050">
                 <a:solidFill>
                   <a:srgbClr val="282828"/>
                 </a:solidFill>
@@ -4227,7 +4444,7 @@
               </a:defRPr>
             </a:pPr>
             <a:r>
-              <a:t>Successfully built a low-cost, low-power autonomous Object Following Robot using the Arduino UNO microcontroller. The multi-sensor scheme tracks target objects or human subjects in real-time.</a:t>
+              <a:t>Designed and built a low-cost, low-power autonomous robot that tracks and follows targets in real-time, validating the core design concepts.</a:t>
             </a:r>
           </a:p>
           <a:p>
@@ -4235,7 +4452,7 @@
               <a:spcAft>
                 <a:spcPts val="200"/>
               </a:spcAft>
-              <a:defRPr sz="1300" b="1">
+              <a:defRPr sz="1250" b="1">
                 <a:solidFill>
                   <a:srgbClr val="1A365D"/>
                 </a:solidFill>
@@ -4243,7 +4460,7 @@
               </a:defRPr>
             </a:pPr>
             <a:r>
-              <a:t>Cost-Effective Tracking</a:t>
+              <a:t>Coordinated Sensor Control</a:t>
             </a:r>
           </a:p>
           <a:p>
@@ -4251,7 +4468,7 @@
               <a:spcAft>
                 <a:spcPts val="1600"/>
               </a:spcAft>
-              <a:defRPr sz="1100">
+              <a:defRPr sz="1050">
                 <a:solidFill>
                   <a:srgbClr val="282828"/>
                 </a:solidFill>
@@ -4259,15 +4476,81 @@
               </a:defRPr>
             </a:pPr>
             <a:r>
-              <a:t>Showed that combining acoustic and infrared sensors provides a reliable tracking envelope, avoiding expensive and power-hungry computer vision processing boards.</a:t>
-            </a:r>
-          </a:p>
+              <a:t>Showed that simple acoustic ranging and infrared proximity sensors provide a reliable tracking envelope, avoiding the need for expensive computer vision hardware.</a:t>
+            </a:r>
+          </a:p>
+        </p:txBody>
+      </p:sp>
+      <p:sp>
+        <p:nvSpPr>
+          <p:cNvPr id="9" name="Rectangle 8"/>
+          <p:cNvSpPr/>
+          <p:nvPr/>
+        </p:nvSpPr>
+        <p:spPr>
+          <a:xfrm>
+            <a:off x="6309360" y="1645920"/>
+            <a:ext cx="4937760" cy="4114800"/>
+          </a:xfrm>
+          <a:prstGeom prst="rect">
+            <a:avLst/>
+          </a:prstGeom>
+          <a:solidFill>
+            <a:srgbClr val="F8FAFC"/>
+          </a:solidFill>
+          <a:ln>
+            <a:noFill/>
+          </a:ln>
+        </p:spPr>
+        <p:style>
+          <a:lnRef idx="1">
+            <a:schemeClr val="accent1"/>
+          </a:lnRef>
+          <a:fillRef idx="3">
+            <a:schemeClr val="accent1"/>
+          </a:fillRef>
+          <a:effectRef idx="2">
+            <a:schemeClr val="accent1"/>
+          </a:effectRef>
+          <a:fontRef idx="minor">
+            <a:schemeClr val="lt1"/>
+          </a:fontRef>
+        </p:style>
+        <p:txBody>
+          <a:bodyPr rtlCol="0" anchor="ctr"/>
+          <a:lstStyle/>
+          <a:p>
+            <a:pPr algn="ctr"/>
+          </a:p>
+        </p:txBody>
+      </p:sp>
+      <p:sp>
+        <p:nvSpPr>
+          <p:cNvPr id="10" name="TextBox 9"/>
+          <p:cNvSpPr txBox="1"/>
+          <p:nvPr/>
+        </p:nvSpPr>
+        <p:spPr>
+          <a:xfrm>
+            <a:off x="6446520" y="1783080"/>
+            <a:ext cx="4663440" cy="3840480"/>
+          </a:xfrm>
+          <a:prstGeom prst="rect">
+            <a:avLst/>
+          </a:prstGeom>
+          <a:noFill/>
+        </p:spPr>
+        <p:txBody>
+          <a:bodyPr wrap="square" lIns="0" rIns="0" tIns="0" bIns="0">
+            <a:spAutoFit/>
+          </a:bodyPr>
+          <a:lstStyle/>
           <a:p>
             <a:pPr>
               <a:spcAft>
                 <a:spcPts val="200"/>
               </a:spcAft>
-              <a:defRPr sz="1300" b="1">
+              <a:defRPr sz="1250" b="1">
                 <a:solidFill>
                   <a:srgbClr val="1A365D"/>
                 </a:solidFill>
@@ -4275,7 +4558,7 @@
               </a:defRPr>
             </a:pPr>
             <a:r>
-              <a:t>Future Work &amp; Enhancements</a:t>
+              <a:t>Verified Differential Steering</a:t>
             </a:r>
           </a:p>
           <a:p>
@@ -4283,7 +4566,7 @@
               <a:spcAft>
                 <a:spcPts val="1600"/>
               </a:spcAft>
-              <a:defRPr sz="1100">
+              <a:defRPr sz="1050">
                 <a:solidFill>
                   <a:srgbClr val="282828"/>
                 </a:solidFill>
@@ -4291,19 +4574,543 @@
               </a:defRPr>
             </a:pPr>
             <a:r>
-              <a:t>Planned expansions to enhance capabilities and resolve current prototype limitations:</a:t>
-            </a:r>
-            <a:br/>
-            <a:r>
-              <a:t>- Re-integrating the servo motor and OLED screen by adding an LM2596 buck converter to isolate electrical loads and prevent resets.</a:t>
-            </a:r>
-            <a:br/>
-            <a:r>
-              <a:t>- Upgrading the microcontroller to an ESP32 with an onboard camera (ESP32-CAM) for human recognition.</a:t>
-            </a:r>
-            <a:br/>
-            <a:r>
-              <a:t>- Implementing a PID control loop for smoother motor acceleration and deceleration curves.</a:t>
+              <a:t>Validates that differential drive steering coupled with state-command sensor feedback handles lateral and forward movements cleanly.</a:t>
+            </a:r>
+          </a:p>
+          <a:p>
+            <a:pPr>
+              <a:spcAft>
+                <a:spcPts val="200"/>
+              </a:spcAft>
+              <a:defRPr sz="1250" b="1">
+                <a:solidFill>
+                  <a:srgbClr val="1A365D"/>
+                </a:solidFill>
+                <a:latin typeface="Arial"/>
+              </a:defRPr>
+            </a:pPr>
+            <a:r>
+              <a:t>Practical Educational Experience</a:t>
+            </a:r>
+          </a:p>
+          <a:p>
+            <a:pPr>
+              <a:spcAft>
+                <a:spcPts val="1600"/>
+              </a:spcAft>
+              <a:defRPr sz="1050">
+                <a:solidFill>
+                  <a:srgbClr val="282828"/>
+                </a:solidFill>
+                <a:latin typeface="Arial"/>
+              </a:defRPr>
+            </a:pPr>
+            <a:r>
+              <a:t>Provided valuable practical experience in hardware-software co-design, electrical power isolation, sensor calibration, and closed-loop control algorithms.</a:t>
+            </a:r>
+          </a:p>
+        </p:txBody>
+      </p:sp>
+    </p:spTree>
+  </p:cSld>
+  <p:clrMapOvr>
+    <a:masterClrMapping/>
+  </p:clrMapOvr>
+</p:sld>
+</file>
+
+<file path=ppt/slides/slide13.xml><?xml version="1.0" encoding="utf-8"?>
+<p:sld xmlns:a="http://schemas.openxmlformats.org/drawingml/2006/main" xmlns:p="http://schemas.openxmlformats.org/presentationml/2006/main" xmlns:r="http://schemas.openxmlformats.org/officeDocument/2006/relationships">
+  <p:cSld>
+    <p:spTree>
+      <p:nvGrpSpPr>
+        <p:cNvPr id="1" name=""/>
+        <p:cNvGrpSpPr/>
+        <p:nvPr/>
+      </p:nvGrpSpPr>
+      <p:grpSpPr/>
+      <p:sp>
+        <p:nvSpPr>
+          <p:cNvPr id="2" name="TextBox 1"/>
+          <p:cNvSpPr txBox="1"/>
+          <p:nvPr/>
+        </p:nvSpPr>
+        <p:spPr>
+          <a:xfrm>
+            <a:off x="731520" y="365760"/>
+            <a:ext cx="10725912" cy="731520"/>
+          </a:xfrm>
+          <a:prstGeom prst="rect">
+            <a:avLst/>
+          </a:prstGeom>
+          <a:noFill/>
+        </p:spPr>
+        <p:txBody>
+          <a:bodyPr wrap="square" lIns="0" rIns="0" tIns="0" bIns="0">
+            <a:spAutoFit/>
+          </a:bodyPr>
+          <a:lstStyle/>
+          <a:p>
+            <a:pPr>
+              <a:defRPr sz="2400" b="1">
+                <a:solidFill>
+                  <a:srgbClr val="1A365D"/>
+                </a:solidFill>
+                <a:latin typeface="Arial"/>
+              </a:defRPr>
+            </a:pPr>
+            <a:r>
+              <a:t>11. Future Scope</a:t>
+            </a:r>
+          </a:p>
+        </p:txBody>
+      </p:sp>
+      <p:sp>
+        <p:nvSpPr>
+          <p:cNvPr id="3" name="Rectangle 2"/>
+          <p:cNvSpPr/>
+          <p:nvPr/>
+        </p:nvSpPr>
+        <p:spPr>
+          <a:xfrm>
+            <a:off x="731520" y="1097280"/>
+            <a:ext cx="10725912" cy="13716"/>
+          </a:xfrm>
+          <a:prstGeom prst="rect">
+            <a:avLst/>
+          </a:prstGeom>
+          <a:solidFill>
+            <a:srgbClr val="1A365D"/>
+          </a:solidFill>
+          <a:ln>
+            <a:noFill/>
+          </a:ln>
+        </p:spPr>
+        <p:style>
+          <a:lnRef idx="1">
+            <a:schemeClr val="accent1"/>
+          </a:lnRef>
+          <a:fillRef idx="3">
+            <a:schemeClr val="accent1"/>
+          </a:fillRef>
+          <a:effectRef idx="2">
+            <a:schemeClr val="accent1"/>
+          </a:effectRef>
+          <a:fontRef idx="minor">
+            <a:schemeClr val="lt1"/>
+          </a:fontRef>
+        </p:style>
+        <p:txBody>
+          <a:bodyPr rtlCol="0" anchor="ctr"/>
+          <a:lstStyle/>
+          <a:p>
+            <a:pPr algn="ctr"/>
+          </a:p>
+        </p:txBody>
+      </p:sp>
+      <p:sp>
+        <p:nvSpPr>
+          <p:cNvPr id="4" name="Rectangle 3"/>
+          <p:cNvSpPr/>
+          <p:nvPr/>
+        </p:nvSpPr>
+        <p:spPr>
+          <a:xfrm>
+            <a:off x="731520" y="6126480"/>
+            <a:ext cx="10725912" cy="9144"/>
+          </a:xfrm>
+          <a:prstGeom prst="rect">
+            <a:avLst/>
+          </a:prstGeom>
+          <a:solidFill>
+            <a:srgbClr val="DCDCDC"/>
+          </a:solidFill>
+          <a:ln>
+            <a:noFill/>
+          </a:ln>
+        </p:spPr>
+        <p:style>
+          <a:lnRef idx="1">
+            <a:schemeClr val="accent1"/>
+          </a:lnRef>
+          <a:fillRef idx="3">
+            <a:schemeClr val="accent1"/>
+          </a:fillRef>
+          <a:effectRef idx="2">
+            <a:schemeClr val="accent1"/>
+          </a:effectRef>
+          <a:fontRef idx="minor">
+            <a:schemeClr val="lt1"/>
+          </a:fontRef>
+        </p:style>
+        <p:txBody>
+          <a:bodyPr rtlCol="0" anchor="ctr"/>
+          <a:lstStyle/>
+          <a:p>
+            <a:pPr algn="ctr"/>
+          </a:p>
+        </p:txBody>
+      </p:sp>
+      <p:sp>
+        <p:nvSpPr>
+          <p:cNvPr id="5" name="TextBox 4"/>
+          <p:cNvSpPr txBox="1"/>
+          <p:nvPr/>
+        </p:nvSpPr>
+        <p:spPr>
+          <a:xfrm>
+            <a:off x="731520" y="6217920"/>
+            <a:ext cx="8229600" cy="365760"/>
+          </a:xfrm>
+          <a:prstGeom prst="rect">
+            <a:avLst/>
+          </a:prstGeom>
+          <a:noFill/>
+        </p:spPr>
+        <p:txBody>
+          <a:bodyPr wrap="square" lIns="0" rIns="0" tIns="0" bIns="0">
+            <a:spAutoFit/>
+          </a:bodyPr>
+          <a:lstStyle/>
+          <a:p>
+            <a:pPr>
+              <a:defRPr sz="850" b="1">
+                <a:solidFill>
+                  <a:srgbClr val="646E78"/>
+                </a:solidFill>
+                <a:latin typeface="Arial"/>
+              </a:defRPr>
+            </a:pPr>
+            <a:r>
+              <a:t>OBJECT FOLLOWING ROBOT USING ARDUINO UNO  |  MINI-PROJECT PRESENTATION</a:t>
+            </a:r>
+          </a:p>
+        </p:txBody>
+      </p:sp>
+      <p:sp>
+        <p:nvSpPr>
+          <p:cNvPr id="6" name="TextBox 5"/>
+          <p:cNvSpPr txBox="1"/>
+          <p:nvPr/>
+        </p:nvSpPr>
+        <p:spPr>
+          <a:xfrm>
+            <a:off x="10058400" y="6217920"/>
+            <a:ext cx="1399032" cy="365760"/>
+          </a:xfrm>
+          <a:prstGeom prst="rect">
+            <a:avLst/>
+          </a:prstGeom>
+          <a:noFill/>
+        </p:spPr>
+        <p:txBody>
+          <a:bodyPr wrap="square" lIns="0" rIns="0" tIns="0" bIns="0">
+            <a:spAutoFit/>
+          </a:bodyPr>
+          <a:lstStyle/>
+          <a:p>
+            <a:pPr algn="r">
+              <a:defRPr sz="850" b="1">
+                <a:solidFill>
+                  <a:srgbClr val="646E78"/>
+                </a:solidFill>
+                <a:latin typeface="Arial"/>
+              </a:defRPr>
+            </a:pPr>
+            <a:r>
+              <a:t>Slide 12 of 12</a:t>
+            </a:r>
+          </a:p>
+        </p:txBody>
+      </p:sp>
+      <p:sp>
+        <p:nvSpPr>
+          <p:cNvPr id="7" name="Rectangle 6"/>
+          <p:cNvSpPr/>
+          <p:nvPr/>
+        </p:nvSpPr>
+        <p:spPr>
+          <a:xfrm>
+            <a:off x="914400" y="1645920"/>
+            <a:ext cx="4663440" cy="4114800"/>
+          </a:xfrm>
+          <a:prstGeom prst="rect">
+            <a:avLst/>
+          </a:prstGeom>
+          <a:solidFill>
+            <a:srgbClr val="F8FAFC"/>
+          </a:solidFill>
+          <a:ln>
+            <a:noFill/>
+          </a:ln>
+        </p:spPr>
+        <p:style>
+          <a:lnRef idx="1">
+            <a:schemeClr val="accent1"/>
+          </a:lnRef>
+          <a:fillRef idx="3">
+            <a:schemeClr val="accent1"/>
+          </a:fillRef>
+          <a:effectRef idx="2">
+            <a:schemeClr val="accent1"/>
+          </a:effectRef>
+          <a:fontRef idx="minor">
+            <a:schemeClr val="lt1"/>
+          </a:fontRef>
+        </p:style>
+        <p:txBody>
+          <a:bodyPr rtlCol="0" anchor="ctr"/>
+          <a:lstStyle/>
+          <a:p>
+            <a:pPr algn="ctr"/>
+          </a:p>
+        </p:txBody>
+      </p:sp>
+      <p:sp>
+        <p:nvSpPr>
+          <p:cNvPr id="8" name="TextBox 7"/>
+          <p:cNvSpPr txBox="1"/>
+          <p:nvPr/>
+        </p:nvSpPr>
+        <p:spPr>
+          <a:xfrm>
+            <a:off x="1051560" y="1783080"/>
+            <a:ext cx="4389120" cy="3840480"/>
+          </a:xfrm>
+          <a:prstGeom prst="rect">
+            <a:avLst/>
+          </a:prstGeom>
+          <a:noFill/>
+        </p:spPr>
+        <p:txBody>
+          <a:bodyPr wrap="square" lIns="0" rIns="0" tIns="0" bIns="0">
+            <a:spAutoFit/>
+          </a:bodyPr>
+          <a:lstStyle/>
+          <a:p>
+            <a:pPr>
+              <a:spcAft>
+                <a:spcPts val="200"/>
+              </a:spcAft>
+              <a:defRPr sz="1250" b="1">
+                <a:solidFill>
+                  <a:srgbClr val="1A365D"/>
+                </a:solidFill>
+                <a:latin typeface="Arial"/>
+              </a:defRPr>
+            </a:pPr>
+            <a:r>
+              <a:t>Active Scanning Servos</a:t>
+            </a:r>
+          </a:p>
+          <a:p>
+            <a:pPr>
+              <a:spcAft>
+                <a:spcPts val="1200"/>
+              </a:spcAft>
+              <a:defRPr sz="1050">
+                <a:solidFill>
+                  <a:srgbClr val="282828"/>
+                </a:solidFill>
+                <a:latin typeface="Arial"/>
+              </a:defRPr>
+            </a:pPr>
+            <a:r>
+              <a:t>Re-integrating the SG90 micro servo motor to rotate the ultrasonic sensor, allowing it to scan the environment up to 180 degrees.</a:t>
+            </a:r>
+          </a:p>
+          <a:p>
+            <a:pPr>
+              <a:spcAft>
+                <a:spcPts val="200"/>
+              </a:spcAft>
+              <a:defRPr sz="1250" b="1">
+                <a:solidFill>
+                  <a:srgbClr val="1A365D"/>
+                </a:solidFill>
+                <a:latin typeface="Arial"/>
+              </a:defRPr>
+            </a:pPr>
+            <a:r>
+              <a:t>Onboard OLED Displays</a:t>
+            </a:r>
+          </a:p>
+          <a:p>
+            <a:pPr>
+              <a:spcAft>
+                <a:spcPts val="1200"/>
+              </a:spcAft>
+              <a:defRPr sz="1050">
+                <a:solidFill>
+                  <a:srgbClr val="282828"/>
+                </a:solidFill>
+                <a:latin typeface="Arial"/>
+              </a:defRPr>
+            </a:pPr>
+            <a:r>
+              <a:t>Re-introducing the 0.96-inch SSD1306 OLED screen to display target distance and operational status.</a:t>
+            </a:r>
+          </a:p>
+          <a:p>
+            <a:pPr>
+              <a:spcAft>
+                <a:spcPts val="200"/>
+              </a:spcAft>
+              <a:defRPr sz="1250" b="1">
+                <a:solidFill>
+                  <a:srgbClr val="1A365D"/>
+                </a:solidFill>
+                <a:latin typeface="Arial"/>
+              </a:defRPr>
+            </a:pPr>
+            <a:r>
+              <a:t>LM2596 Power Isolation</a:t>
+            </a:r>
+          </a:p>
+          <a:p>
+            <a:pPr>
+              <a:spcAft>
+                <a:spcPts val="1200"/>
+              </a:spcAft>
+              <a:defRPr sz="1050">
+                <a:solidFill>
+                  <a:srgbClr val="282828"/>
+                </a:solidFill>
+                <a:latin typeface="Arial"/>
+              </a:defRPr>
+            </a:pPr>
+            <a:r>
+              <a:t>Adding a step-down buck converter to isolate the servo's high current draw from the logic rails, preventing resets.</a:t>
+            </a:r>
+          </a:p>
+        </p:txBody>
+      </p:sp>
+      <p:sp>
+        <p:nvSpPr>
+          <p:cNvPr id="9" name="Rectangle 8"/>
+          <p:cNvSpPr/>
+          <p:nvPr/>
+        </p:nvSpPr>
+        <p:spPr>
+          <a:xfrm>
+            <a:off x="6309360" y="1645920"/>
+            <a:ext cx="4937760" cy="4114800"/>
+          </a:xfrm>
+          <a:prstGeom prst="rect">
+            <a:avLst/>
+          </a:prstGeom>
+          <a:solidFill>
+            <a:srgbClr val="F8FAFC"/>
+          </a:solidFill>
+          <a:ln>
+            <a:noFill/>
+          </a:ln>
+        </p:spPr>
+        <p:style>
+          <a:lnRef idx="1">
+            <a:schemeClr val="accent1"/>
+          </a:lnRef>
+          <a:fillRef idx="3">
+            <a:schemeClr val="accent1"/>
+          </a:fillRef>
+          <a:effectRef idx="2">
+            <a:schemeClr val="accent1"/>
+          </a:effectRef>
+          <a:fontRef idx="minor">
+            <a:schemeClr val="lt1"/>
+          </a:fontRef>
+        </p:style>
+        <p:txBody>
+          <a:bodyPr rtlCol="0" anchor="ctr"/>
+          <a:lstStyle/>
+          <a:p>
+            <a:pPr algn="ctr"/>
+          </a:p>
+        </p:txBody>
+      </p:sp>
+      <p:sp>
+        <p:nvSpPr>
+          <p:cNvPr id="10" name="TextBox 9"/>
+          <p:cNvSpPr txBox="1"/>
+          <p:nvPr/>
+        </p:nvSpPr>
+        <p:spPr>
+          <a:xfrm>
+            <a:off x="6446520" y="1783080"/>
+            <a:ext cx="4663440" cy="3840480"/>
+          </a:xfrm>
+          <a:prstGeom prst="rect">
+            <a:avLst/>
+          </a:prstGeom>
+          <a:noFill/>
+        </p:spPr>
+        <p:txBody>
+          <a:bodyPr wrap="square" lIns="0" rIns="0" tIns="0" bIns="0">
+            <a:spAutoFit/>
+          </a:bodyPr>
+          <a:lstStyle/>
+          <a:p>
+            <a:pPr>
+              <a:spcAft>
+                <a:spcPts val="200"/>
+              </a:spcAft>
+              <a:defRPr sz="1250" b="1">
+                <a:solidFill>
+                  <a:srgbClr val="1A365D"/>
+                </a:solidFill>
+                <a:latin typeface="Arial"/>
+              </a:defRPr>
+            </a:pPr>
+            <a:r>
+              <a:t>ESP32-CAM Recognition</a:t>
+            </a:r>
+          </a:p>
+          <a:p>
+            <a:pPr>
+              <a:spcAft>
+                <a:spcPts val="1200"/>
+              </a:spcAft>
+              <a:defRPr sz="1050">
+                <a:solidFill>
+                  <a:srgbClr val="282828"/>
+                </a:solidFill>
+                <a:latin typeface="Arial"/>
+              </a:defRPr>
+            </a:pPr>
+            <a:r>
+              <a:t>Upgrading the core microcontroller to an ESP32 with an onboard camera (ESP32-CAM) to support face detection and human recognition.</a:t>
+            </a:r>
+          </a:p>
+          <a:p>
+            <a:pPr>
+              <a:spcAft>
+                <a:spcPts val="200"/>
+              </a:spcAft>
+              <a:defRPr sz="1250" b="1">
+                <a:solidFill>
+                  <a:srgbClr val="1A365D"/>
+                </a:solidFill>
+                <a:latin typeface="Arial"/>
+              </a:defRPr>
+            </a:pPr>
+            <a:r>
+              <a:t>PID Control Steering</a:t>
+            </a:r>
+          </a:p>
+          <a:p>
+            <a:pPr>
+              <a:spcAft>
+                <a:spcPts val="1200"/>
+              </a:spcAft>
+              <a:defRPr sz="1050">
+                <a:solidFill>
+                  <a:srgbClr val="282828"/>
+                </a:solidFill>
+                <a:latin typeface="Arial"/>
+              </a:defRPr>
+            </a:pPr>
+            <a:r>
+              <a:t>Implementing a Proportional-Integral-Derivative (PID) control loop to adjust motor speed dynamically, creating smoother acceleration and turning curves.</a:t>
             </a:r>
           </a:p>
         </p:txBody>
@@ -4380,9 +5187,7 @@
             <a:srgbClr val="1A365D"/>
           </a:solidFill>
           <a:ln>
-            <a:solidFill>
-              <a:srgbClr val="1A365D"/>
-            </a:solidFill>
+            <a:noFill/>
           </a:ln>
         </p:spPr>
         <p:style>
@@ -4425,9 +5230,7 @@
             <a:srgbClr val="DCDCDC"/>
           </a:solidFill>
           <a:ln>
-            <a:solidFill>
-              <a:srgbClr val="DCDCDC"/>
-            </a:solidFill>
+            <a:noFill/>
           </a:ln>
         </p:spPr>
         <p:style>
@@ -4519,21 +5322,64 @@
               </a:defRPr>
             </a:pPr>
             <a:r>
-              <a:t>Slide 1 of 11</a:t>
-            </a:r>
-          </a:p>
-        </p:txBody>
-      </p:sp>
-      <p:sp>
-        <p:nvSpPr>
-          <p:cNvPr id="7" name="TextBox 6"/>
+              <a:t>Slide 1 of 12</a:t>
+            </a:r>
+          </a:p>
+        </p:txBody>
+      </p:sp>
+      <p:sp>
+        <p:nvSpPr>
+          <p:cNvPr id="7" name="Rectangle 6"/>
+          <p:cNvSpPr/>
+          <p:nvPr/>
+        </p:nvSpPr>
+        <p:spPr>
+          <a:xfrm>
+            <a:off x="914400" y="1645920"/>
+            <a:ext cx="4663440" cy="4114800"/>
+          </a:xfrm>
+          <a:prstGeom prst="rect">
+            <a:avLst/>
+          </a:prstGeom>
+          <a:solidFill>
+            <a:srgbClr val="F8FAFC"/>
+          </a:solidFill>
+          <a:ln>
+            <a:noFill/>
+          </a:ln>
+        </p:spPr>
+        <p:style>
+          <a:lnRef idx="1">
+            <a:schemeClr val="accent1"/>
+          </a:lnRef>
+          <a:fillRef idx="3">
+            <a:schemeClr val="accent1"/>
+          </a:fillRef>
+          <a:effectRef idx="2">
+            <a:schemeClr val="accent1"/>
+          </a:effectRef>
+          <a:fontRef idx="minor">
+            <a:schemeClr val="lt1"/>
+          </a:fontRef>
+        </p:style>
+        <p:txBody>
+          <a:bodyPr rtlCol="0" anchor="ctr"/>
+          <a:lstStyle/>
+          <a:p>
+            <a:pPr algn="ctr"/>
+          </a:p>
+        </p:txBody>
+      </p:sp>
+      <p:sp>
+        <p:nvSpPr>
+          <p:cNvPr id="8" name="TextBox 7"/>
           <p:cNvSpPr txBox="1"/>
           <p:nvPr/>
         </p:nvSpPr>
         <p:spPr>
           <a:xfrm>
-            <a:off x="914400" y="1645920"/>
-            <a:ext cx="4754880" cy="4114800"/>
+            <a:off x="1051560" y="1783080"/>
+            <a:ext cx="4389120" cy="3840480"/>
           </a:xfrm>
           <a:prstGeom prst="rect">
             <a:avLst/>
@@ -4564,9 +5410,9 @@
           <a:p>
             <a:pPr>
               <a:spcAft>
-                <a:spcPts val="1400"/>
-              </a:spcAft>
-              <a:defRPr sz="1050">
+                <a:spcPts val="1200"/>
+              </a:spcAft>
+              <a:defRPr sz="1000">
                 <a:solidFill>
                   <a:srgbClr val="282828"/>
                 </a:solidFill>
@@ -4596,9 +5442,9 @@
           <a:p>
             <a:pPr>
               <a:spcAft>
-                <a:spcPts val="1400"/>
-              </a:spcAft>
-              <a:defRPr sz="1050">
+                <a:spcPts val="1200"/>
+              </a:spcAft>
+              <a:defRPr sz="1000">
                 <a:solidFill>
                   <a:srgbClr val="282828"/>
                 </a:solidFill>
@@ -4628,9 +5474,9 @@
           <a:p>
             <a:pPr>
               <a:spcAft>
-                <a:spcPts val="1400"/>
-              </a:spcAft>
-              <a:defRPr sz="1050">
+                <a:spcPts val="1200"/>
+              </a:spcAft>
+              <a:defRPr sz="1000">
                 <a:solidFill>
                   <a:srgbClr val="282828"/>
                 </a:solidFill>
@@ -4660,9 +5506,9 @@
           <a:p>
             <a:pPr>
               <a:spcAft>
-                <a:spcPts val="1400"/>
-              </a:spcAft>
-              <a:defRPr sz="1050">
+                <a:spcPts val="1200"/>
+              </a:spcAft>
+              <a:defRPr sz="1000">
                 <a:solidFill>
                   <a:srgbClr val="282828"/>
                 </a:solidFill>
@@ -4692,9 +5538,9 @@
           <a:p>
             <a:pPr>
               <a:spcAft>
-                <a:spcPts val="1400"/>
-              </a:spcAft>
-              <a:defRPr sz="1050">
+                <a:spcPts val="1200"/>
+              </a:spcAft>
+              <a:defRPr sz="1000">
                 <a:solidFill>
                   <a:srgbClr val="282828"/>
                 </a:solidFill>
@@ -4709,14 +5555,57 @@
       </p:sp>
       <p:sp>
         <p:nvSpPr>
-          <p:cNvPr id="8" name="TextBox 7"/>
+          <p:cNvPr id="9" name="Rectangle 8"/>
+          <p:cNvSpPr/>
+          <p:nvPr/>
+        </p:nvSpPr>
+        <p:spPr>
+          <a:xfrm>
+            <a:off x="6309360" y="1645920"/>
+            <a:ext cx="4937760" cy="4114800"/>
+          </a:xfrm>
+          <a:prstGeom prst="rect">
+            <a:avLst/>
+          </a:prstGeom>
+          <a:solidFill>
+            <a:srgbClr val="F8FAFC"/>
+          </a:solidFill>
+          <a:ln>
+            <a:noFill/>
+          </a:ln>
+        </p:spPr>
+        <p:style>
+          <a:lnRef idx="1">
+            <a:schemeClr val="accent1"/>
+          </a:lnRef>
+          <a:fillRef idx="3">
+            <a:schemeClr val="accent1"/>
+          </a:fillRef>
+          <a:effectRef idx="2">
+            <a:schemeClr val="accent1"/>
+          </a:effectRef>
+          <a:fontRef idx="minor">
+            <a:schemeClr val="lt1"/>
+          </a:fontRef>
+        </p:style>
+        <p:txBody>
+          <a:bodyPr rtlCol="0" anchor="ctr"/>
+          <a:lstStyle/>
+          <a:p>
+            <a:pPr algn="ctr"/>
+          </a:p>
+        </p:txBody>
+      </p:sp>
+      <p:sp>
+        <p:nvSpPr>
+          <p:cNvPr id="10" name="TextBox 9"/>
           <p:cNvSpPr txBox="1"/>
           <p:nvPr/>
         </p:nvSpPr>
         <p:spPr>
           <a:xfrm>
-            <a:off x="6217920" y="1645920"/>
-            <a:ext cx="4754880" cy="4114800"/>
+            <a:off x="6446520" y="1783080"/>
+            <a:ext cx="4663440" cy="3840480"/>
           </a:xfrm>
           <a:prstGeom prst="rect">
             <a:avLst/>
@@ -4747,9 +5636,9 @@
           <a:p>
             <a:pPr>
               <a:spcAft>
-                <a:spcPts val="1400"/>
-              </a:spcAft>
-              <a:defRPr sz="1050">
+                <a:spcPts val="600"/>
+              </a:spcAft>
+              <a:defRPr sz="1000">
                 <a:solidFill>
                   <a:srgbClr val="282828"/>
                 </a:solidFill>
@@ -4779,9 +5668,9 @@
           <a:p>
             <a:pPr>
               <a:spcAft>
-                <a:spcPts val="1400"/>
-              </a:spcAft>
-              <a:defRPr sz="1050">
+                <a:spcPts val="600"/>
+              </a:spcAft>
+              <a:defRPr sz="1000">
                 <a:solidFill>
                   <a:srgbClr val="282828"/>
                 </a:solidFill>
@@ -4811,9 +5700,9 @@
           <a:p>
             <a:pPr>
               <a:spcAft>
-                <a:spcPts val="1400"/>
-              </a:spcAft>
-              <a:defRPr sz="1050">
+                <a:spcPts val="600"/>
+              </a:spcAft>
+              <a:defRPr sz="1000">
                 <a:solidFill>
                   <a:srgbClr val="282828"/>
                 </a:solidFill>
@@ -4843,9 +5732,9 @@
           <a:p>
             <a:pPr>
               <a:spcAft>
-                <a:spcPts val="1400"/>
-              </a:spcAft>
-              <a:defRPr sz="1050">
+                <a:spcPts val="600"/>
+              </a:spcAft>
+              <a:defRPr sz="1000">
                 <a:solidFill>
                   <a:srgbClr val="282828"/>
                 </a:solidFill>
@@ -4853,7 +5742,7 @@
               </a:defRPr>
             </a:pPr>
             <a:r>
-              <a:t>Experimental ranging trials, system latency, and battery rtimes.</a:t>
+              <a:t>Experimental ranging trials, system latency, and battery runtimes.</a:t>
             </a:r>
           </a:p>
           <a:p>
@@ -4869,15 +5758,15 @@
               </a:defRPr>
             </a:pPr>
             <a:r>
-              <a:t>10. CONCLUSIONS &amp; FUTURE SCOPE</a:t>
-            </a:r>
-          </a:p>
-          <a:p>
-            <a:pPr>
-              <a:spcAft>
-                <a:spcPts val="1400"/>
-              </a:spcAft>
-              <a:defRPr sz="1050">
+              <a:t>10. CONCLUSIONS</a:t>
+            </a:r>
+          </a:p>
+          <a:p>
+            <a:pPr>
+              <a:spcAft>
+                <a:spcPts val="600"/>
+              </a:spcAft>
+              <a:defRPr sz="1000">
                 <a:solidFill>
                   <a:srgbClr val="282828"/>
                 </a:solidFill>
@@ -4885,7 +5774,39 @@
               </a:defRPr>
             </a:pPr>
             <a:r>
-              <a:t>Summary of prototype and solutions to auxiliary voltage drop resets.</a:t>
+              <a:t>Summary of completed physical prototype and design achievements.</a:t>
+            </a:r>
+          </a:p>
+          <a:p>
+            <a:pPr>
+              <a:spcAft>
+                <a:spcPts val="200"/>
+              </a:spcAft>
+              <a:defRPr sz="1150" b="1">
+                <a:solidFill>
+                  <a:srgbClr val="1A365D"/>
+                </a:solidFill>
+                <a:latin typeface="Arial"/>
+              </a:defRPr>
+            </a:pPr>
+            <a:r>
+              <a:t>11. FUTURE SCOPE</a:t>
+            </a:r>
+          </a:p>
+          <a:p>
+            <a:pPr>
+              <a:spcAft>
+                <a:spcPts val="600"/>
+              </a:spcAft>
+              <a:defRPr sz="1000">
+                <a:solidFill>
+                  <a:srgbClr val="282828"/>
+                </a:solidFill>
+                <a:latin typeface="Arial"/>
+              </a:defRPr>
+            </a:pPr>
+            <a:r>
+              <a:t>Solutions to voltage drops and proposed ESP32-CAM and PID upgrades.</a:t>
             </a:r>
           </a:p>
         </p:txBody>
@@ -4962,9 +5883,7 @@
             <a:srgbClr val="1A365D"/>
           </a:solidFill>
           <a:ln>
-            <a:solidFill>
-              <a:srgbClr val="1A365D"/>
-            </a:solidFill>
+            <a:noFill/>
           </a:ln>
         </p:spPr>
         <p:style>
@@ -5007,9 +5926,7 @@
             <a:srgbClr val="DCDCDC"/>
           </a:solidFill>
           <a:ln>
-            <a:solidFill>
-              <a:srgbClr val="DCDCDC"/>
-            </a:solidFill>
+            <a:noFill/>
           </a:ln>
         </p:spPr>
         <p:style>
@@ -5101,21 +6018,64 @@
               </a:defRPr>
             </a:pPr>
             <a:r>
-              <a:t>Slide 2 of 11</a:t>
-            </a:r>
-          </a:p>
-        </p:txBody>
-      </p:sp>
-      <p:sp>
-        <p:nvSpPr>
-          <p:cNvPr id="7" name="TextBox 6"/>
+              <a:t>Slide 2 of 12</a:t>
+            </a:r>
+          </a:p>
+        </p:txBody>
+      </p:sp>
+      <p:sp>
+        <p:nvSpPr>
+          <p:cNvPr id="7" name="Rectangle 6"/>
+          <p:cNvSpPr/>
+          <p:nvPr/>
+        </p:nvSpPr>
+        <p:spPr>
+          <a:xfrm>
+            <a:off x="914400" y="1645920"/>
+            <a:ext cx="4663440" cy="4114800"/>
+          </a:xfrm>
+          <a:prstGeom prst="rect">
+            <a:avLst/>
+          </a:prstGeom>
+          <a:solidFill>
+            <a:srgbClr val="F8FAFC"/>
+          </a:solidFill>
+          <a:ln>
+            <a:noFill/>
+          </a:ln>
+        </p:spPr>
+        <p:style>
+          <a:lnRef idx="1">
+            <a:schemeClr val="accent1"/>
+          </a:lnRef>
+          <a:fillRef idx="3">
+            <a:schemeClr val="accent1"/>
+          </a:fillRef>
+          <a:effectRef idx="2">
+            <a:schemeClr val="accent1"/>
+          </a:effectRef>
+          <a:fontRef idx="minor">
+            <a:schemeClr val="lt1"/>
+          </a:fontRef>
+        </p:style>
+        <p:txBody>
+          <a:bodyPr rtlCol="0" anchor="ctr"/>
+          <a:lstStyle/>
+          <a:p>
+            <a:pPr algn="ctr"/>
+          </a:p>
+        </p:txBody>
+      </p:sp>
+      <p:sp>
+        <p:nvSpPr>
+          <p:cNvPr id="8" name="TextBox 7"/>
           <p:cNvSpPr txBox="1"/>
           <p:nvPr/>
         </p:nvSpPr>
         <p:spPr>
           <a:xfrm>
-            <a:off x="914400" y="1645920"/>
-            <a:ext cx="10332720" cy="4114800"/>
+            <a:off x="1051560" y="1783080"/>
+            <a:ext cx="4389120" cy="3840480"/>
           </a:xfrm>
           <a:prstGeom prst="rect">
             <a:avLst/>
@@ -5132,7 +6092,7 @@
               <a:spcAft>
                 <a:spcPts val="200"/>
               </a:spcAft>
-              <a:defRPr sz="1300" b="1">
+              <a:defRPr sz="1250" b="1">
                 <a:solidFill>
                   <a:srgbClr val="1A365D"/>
                 </a:solidFill>
@@ -5146,9 +6106,9 @@
           <a:p>
             <a:pPr>
               <a:spcAft>
-                <a:spcPts val="1600"/>
-              </a:spcAft>
-              <a:defRPr sz="1100">
+                <a:spcPts val="1400"/>
+              </a:spcAft>
+              <a:defRPr sz="1050">
                 <a:solidFill>
                   <a:srgbClr val="282828"/>
                 </a:solidFill>
@@ -5164,7 +6124,7 @@
               <a:spcAft>
                 <a:spcPts val="200"/>
               </a:spcAft>
-              <a:defRPr sz="1300" b="1">
+              <a:defRPr sz="1250" b="1">
                 <a:solidFill>
                   <a:srgbClr val="1A365D"/>
                 </a:solidFill>
@@ -5178,9 +6138,9 @@
           <a:p>
             <a:pPr>
               <a:spcAft>
-                <a:spcPts val="1600"/>
-              </a:spcAft>
-              <a:defRPr sz="1100">
+                <a:spcPts val="1400"/>
+              </a:spcAft>
+              <a:defRPr sz="1050">
                 <a:solidFill>
                   <a:srgbClr val="282828"/>
                 </a:solidFill>
@@ -5191,12 +6151,78 @@
               <a:t>Traditional vision-based human tracking requires high processing power (like Raspberry Pi boards), increasing weight, cost, and power consumption. Acoustic and IR sensors offer a low-cost, power-efficient alternative.</a:t>
             </a:r>
           </a:p>
+        </p:txBody>
+      </p:sp>
+      <p:sp>
+        <p:nvSpPr>
+          <p:cNvPr id="9" name="Rectangle 8"/>
+          <p:cNvSpPr/>
+          <p:nvPr/>
+        </p:nvSpPr>
+        <p:spPr>
+          <a:xfrm>
+            <a:off x="6309360" y="1645920"/>
+            <a:ext cx="4937760" cy="4114800"/>
+          </a:xfrm>
+          <a:prstGeom prst="rect">
+            <a:avLst/>
+          </a:prstGeom>
+          <a:solidFill>
+            <a:srgbClr val="F8FAFC"/>
+          </a:solidFill>
+          <a:ln>
+            <a:noFill/>
+          </a:ln>
+        </p:spPr>
+        <p:style>
+          <a:lnRef idx="1">
+            <a:schemeClr val="accent1"/>
+          </a:lnRef>
+          <a:fillRef idx="3">
+            <a:schemeClr val="accent1"/>
+          </a:fillRef>
+          <a:effectRef idx="2">
+            <a:schemeClr val="accent1"/>
+          </a:effectRef>
+          <a:fontRef idx="minor">
+            <a:schemeClr val="lt1"/>
+          </a:fontRef>
+        </p:style>
+        <p:txBody>
+          <a:bodyPr rtlCol="0" anchor="ctr"/>
+          <a:lstStyle/>
+          <a:p>
+            <a:pPr algn="ctr"/>
+          </a:p>
+        </p:txBody>
+      </p:sp>
+      <p:sp>
+        <p:nvSpPr>
+          <p:cNvPr id="10" name="TextBox 9"/>
+          <p:cNvSpPr txBox="1"/>
+          <p:nvPr/>
+        </p:nvSpPr>
+        <p:spPr>
+          <a:xfrm>
+            <a:off x="6446520" y="1783080"/>
+            <a:ext cx="4663440" cy="3840480"/>
+          </a:xfrm>
+          <a:prstGeom prst="rect">
+            <a:avLst/>
+          </a:prstGeom>
+          <a:noFill/>
+        </p:spPr>
+        <p:txBody>
+          <a:bodyPr wrap="square" lIns="0" rIns="0" tIns="0" bIns="0">
+            <a:spAutoFit/>
+          </a:bodyPr>
+          <a:lstStyle/>
           <a:p>
             <a:pPr>
               <a:spcAft>
                 <a:spcPts val="200"/>
               </a:spcAft>
-              <a:defRPr sz="1300" b="1">
+              <a:defRPr sz="1250" b="1">
                 <a:solidFill>
                   <a:srgbClr val="1A365D"/>
                 </a:solidFill>
@@ -5204,15 +6230,15 @@
               </a:defRPr>
             </a:pPr>
             <a:r>
-              <a:t>Multi-Sensor System</a:t>
-            </a:r>
-          </a:p>
-          <a:p>
-            <a:pPr>
-              <a:spcAft>
-                <a:spcPts val="1600"/>
-              </a:spcAft>
-              <a:defRPr sz="1100">
+              <a:t>Multi-Sensor System Configuration</a:t>
+            </a:r>
+          </a:p>
+          <a:p>
+            <a:pPr>
+              <a:spcAft>
+                <a:spcPts val="1400"/>
+              </a:spcAft>
+              <a:defRPr sz="1050">
                 <a:solidFill>
                   <a:srgbClr val="282828"/>
                 </a:solidFill>
@@ -5228,7 +6254,7 @@
               <a:spcAft>
                 <a:spcPts val="200"/>
               </a:spcAft>
-              <a:defRPr sz="1300" b="1">
+              <a:defRPr sz="1250" b="1">
                 <a:solidFill>
                   <a:srgbClr val="1A365D"/>
                 </a:solidFill>
@@ -5242,9 +6268,9 @@
           <a:p>
             <a:pPr>
               <a:spcAft>
-                <a:spcPts val="1600"/>
-              </a:spcAft>
-              <a:defRPr sz="1100">
+                <a:spcPts val="1400"/>
+              </a:spcAft>
+              <a:defRPr sz="1050">
                 <a:solidFill>
                   <a:srgbClr val="282828"/>
                 </a:solidFill>
@@ -5329,9 +6355,7 @@
             <a:srgbClr val="1A365D"/>
           </a:solidFill>
           <a:ln>
-            <a:solidFill>
-              <a:srgbClr val="1A365D"/>
-            </a:solidFill>
+            <a:noFill/>
           </a:ln>
         </p:spPr>
         <p:style>
@@ -5374,9 +6398,7 @@
             <a:srgbClr val="DCDCDC"/>
           </a:solidFill>
           <a:ln>
-            <a:solidFill>
-              <a:srgbClr val="DCDCDC"/>
-            </a:solidFill>
+            <a:noFill/>
           </a:ln>
         </p:spPr>
         <p:style>
@@ -5468,21 +6490,64 @@
               </a:defRPr>
             </a:pPr>
             <a:r>
-              <a:t>Slide 3 of 11</a:t>
-            </a:r>
-          </a:p>
-        </p:txBody>
-      </p:sp>
-      <p:sp>
-        <p:nvSpPr>
-          <p:cNvPr id="7" name="TextBox 6"/>
+              <a:t>Slide 3 of 12</a:t>
+            </a:r>
+          </a:p>
+        </p:txBody>
+      </p:sp>
+      <p:sp>
+        <p:nvSpPr>
+          <p:cNvPr id="7" name="Rectangle 6"/>
+          <p:cNvSpPr/>
+          <p:nvPr/>
+        </p:nvSpPr>
+        <p:spPr>
+          <a:xfrm>
+            <a:off x="914400" y="1645920"/>
+            <a:ext cx="4663440" cy="4114800"/>
+          </a:xfrm>
+          <a:prstGeom prst="rect">
+            <a:avLst/>
+          </a:prstGeom>
+          <a:solidFill>
+            <a:srgbClr val="F8FAFC"/>
+          </a:solidFill>
+          <a:ln>
+            <a:noFill/>
+          </a:ln>
+        </p:spPr>
+        <p:style>
+          <a:lnRef idx="1">
+            <a:schemeClr val="accent1"/>
+          </a:lnRef>
+          <a:fillRef idx="3">
+            <a:schemeClr val="accent1"/>
+          </a:fillRef>
+          <a:effectRef idx="2">
+            <a:schemeClr val="accent1"/>
+          </a:effectRef>
+          <a:fontRef idx="minor">
+            <a:schemeClr val="lt1"/>
+          </a:fontRef>
+        </p:style>
+        <p:txBody>
+          <a:bodyPr rtlCol="0" anchor="ctr"/>
+          <a:lstStyle/>
+          <a:p>
+            <a:pPr algn="ctr"/>
+          </a:p>
+        </p:txBody>
+      </p:sp>
+      <p:sp>
+        <p:nvSpPr>
+          <p:cNvPr id="8" name="TextBox 7"/>
           <p:cNvSpPr txBox="1"/>
           <p:nvPr/>
         </p:nvSpPr>
         <p:spPr>
           <a:xfrm>
-            <a:off x="914400" y="1645920"/>
-            <a:ext cx="4754880" cy="4114800"/>
+            <a:off x="1051560" y="1783080"/>
+            <a:ext cx="4389120" cy="3840480"/>
           </a:xfrm>
           <a:prstGeom prst="rect">
             <a:avLst/>
@@ -5499,7 +6564,7 @@
               <a:spcAft>
                 <a:spcPts val="200"/>
               </a:spcAft>
-              <a:defRPr sz="1300" b="1">
+              <a:defRPr sz="1250" b="1">
                 <a:solidFill>
                   <a:srgbClr val="1A365D"/>
                 </a:solidFill>
@@ -5513,9 +6578,9 @@
           <a:p>
             <a:pPr>
               <a:spcAft>
-                <a:spcPts val="1800"/>
-              </a:spcAft>
-              <a:defRPr sz="1100">
+                <a:spcPts val="1400"/>
+              </a:spcAft>
+              <a:defRPr sz="1050">
                 <a:solidFill>
                   <a:srgbClr val="282828"/>
                 </a:solidFill>
@@ -5531,7 +6596,7 @@
               <a:spcAft>
                 <a:spcPts val="200"/>
               </a:spcAft>
-              <a:defRPr sz="1300" b="1">
+              <a:defRPr sz="1250" b="1">
                 <a:solidFill>
                   <a:srgbClr val="1A365D"/>
                 </a:solidFill>
@@ -5545,9 +6610,9 @@
           <a:p>
             <a:pPr>
               <a:spcAft>
-                <a:spcPts val="1800"/>
-              </a:spcAft>
-              <a:defRPr sz="1100">
+                <a:spcPts val="1400"/>
+              </a:spcAft>
+              <a:defRPr sz="1050">
                 <a:solidFill>
                   <a:srgbClr val="282828"/>
                 </a:solidFill>
@@ -5563,7 +6628,7 @@
               <a:spcAft>
                 <a:spcPts val="200"/>
               </a:spcAft>
-              <a:defRPr sz="1300" b="1">
+              <a:defRPr sz="1250" b="1">
                 <a:solidFill>
                   <a:srgbClr val="1A365D"/>
                 </a:solidFill>
@@ -5577,9 +6642,9 @@
           <a:p>
             <a:pPr>
               <a:spcAft>
-                <a:spcPts val="1800"/>
-              </a:spcAft>
-              <a:defRPr sz="1100">
+                <a:spcPts val="1400"/>
+              </a:spcAft>
+              <a:defRPr sz="1050">
                 <a:solidFill>
                   <a:srgbClr val="282828"/>
                 </a:solidFill>
@@ -5594,7 +6659,7 @@
       </p:sp>
       <p:pic>
         <p:nvPicPr>
-          <p:cNvPr id="8" name="Picture 7" descr="block_diagram.png"/>
+          <p:cNvPr id="9" name="Picture 8" descr="block_diagram.png"/>
           <p:cNvPicPr>
             <a:picLocks noChangeAspect="1"/>
           </p:cNvPicPr>
@@ -5608,8 +6673,8 @@
         </p:blipFill>
         <p:spPr>
           <a:xfrm>
-            <a:off x="6217920" y="1645920"/>
-            <a:ext cx="5029200" cy="4023360"/>
+            <a:off x="6309360" y="2843784"/>
+            <a:ext cx="4937760" cy="1709928"/>
           </a:xfrm>
           <a:prstGeom prst="rect">
             <a:avLst/>
@@ -5688,9 +6753,7 @@
             <a:srgbClr val="1A365D"/>
           </a:solidFill>
           <a:ln>
-            <a:solidFill>
-              <a:srgbClr val="1A365D"/>
-            </a:solidFill>
+            <a:noFill/>
           </a:ln>
         </p:spPr>
         <p:style>
@@ -5733,9 +6796,7 @@
             <a:srgbClr val="DCDCDC"/>
           </a:solidFill>
           <a:ln>
-            <a:solidFill>
-              <a:srgbClr val="DCDCDC"/>
-            </a:solidFill>
+            <a:noFill/>
           </a:ln>
         </p:spPr>
         <p:style>
@@ -5827,21 +6888,64 @@
               </a:defRPr>
             </a:pPr>
             <a:r>
-              <a:t>Slide 4 of 11</a:t>
-            </a:r>
-          </a:p>
-        </p:txBody>
-      </p:sp>
-      <p:sp>
-        <p:nvSpPr>
-          <p:cNvPr id="7" name="TextBox 6"/>
+              <a:t>Slide 4 of 12</a:t>
+            </a:r>
+          </a:p>
+        </p:txBody>
+      </p:sp>
+      <p:sp>
+        <p:nvSpPr>
+          <p:cNvPr id="7" name="Rectangle 6"/>
+          <p:cNvSpPr/>
+          <p:nvPr/>
+        </p:nvSpPr>
+        <p:spPr>
+          <a:xfrm>
+            <a:off x="914400" y="1645920"/>
+            <a:ext cx="4663440" cy="4114800"/>
+          </a:xfrm>
+          <a:prstGeom prst="rect">
+            <a:avLst/>
+          </a:prstGeom>
+          <a:solidFill>
+            <a:srgbClr val="F8FAFC"/>
+          </a:solidFill>
+          <a:ln>
+            <a:noFill/>
+          </a:ln>
+        </p:spPr>
+        <p:style>
+          <a:lnRef idx="1">
+            <a:schemeClr val="accent1"/>
+          </a:lnRef>
+          <a:fillRef idx="3">
+            <a:schemeClr val="accent1"/>
+          </a:fillRef>
+          <a:effectRef idx="2">
+            <a:schemeClr val="accent1"/>
+          </a:effectRef>
+          <a:fontRef idx="minor">
+            <a:schemeClr val="lt1"/>
+          </a:fontRef>
+        </p:style>
+        <p:txBody>
+          <a:bodyPr rtlCol="0" anchor="ctr"/>
+          <a:lstStyle/>
+          <a:p>
+            <a:pPr algn="ctr"/>
+          </a:p>
+        </p:txBody>
+      </p:sp>
+      <p:sp>
+        <p:nvSpPr>
+          <p:cNvPr id="8" name="TextBox 7"/>
           <p:cNvSpPr txBox="1"/>
           <p:nvPr/>
         </p:nvSpPr>
         <p:spPr>
           <a:xfrm>
-            <a:off x="914400" y="1645920"/>
-            <a:ext cx="4754880" cy="4114800"/>
+            <a:off x="1051560" y="1783080"/>
+            <a:ext cx="4389120" cy="3840480"/>
           </a:xfrm>
           <a:prstGeom prst="rect">
             <a:avLst/>
@@ -5858,7 +6962,7 @@
               <a:spcAft>
                 <a:spcPts val="200"/>
               </a:spcAft>
-              <a:defRPr sz="1300" b="1">
+              <a:defRPr sz="1250" b="1">
                 <a:solidFill>
                   <a:srgbClr val="1A365D"/>
                 </a:solidFill>
@@ -5872,9 +6976,9 @@
           <a:p>
             <a:pPr>
               <a:spcAft>
-                <a:spcPts val="1800"/>
-              </a:spcAft>
-              <a:defRPr sz="1100">
+                <a:spcPts val="1400"/>
+              </a:spcAft>
+              <a:defRPr sz="1050">
                 <a:solidFill>
                   <a:srgbClr val="282828"/>
                 </a:solidFill>
@@ -5890,7 +6994,7 @@
               <a:spcAft>
                 <a:spcPts val="200"/>
               </a:spcAft>
-              <a:defRPr sz="1300" b="1">
+              <a:defRPr sz="1250" b="1">
                 <a:solidFill>
                   <a:srgbClr val="1A365D"/>
                 </a:solidFill>
@@ -5904,9 +7008,9 @@
           <a:p>
             <a:pPr>
               <a:spcAft>
-                <a:spcPts val="1800"/>
-              </a:spcAft>
-              <a:defRPr sz="1100">
+                <a:spcPts val="1400"/>
+              </a:spcAft>
+              <a:defRPr sz="1050">
                 <a:solidFill>
                   <a:srgbClr val="282828"/>
                 </a:solidFill>
@@ -5922,7 +7026,7 @@
               <a:spcAft>
                 <a:spcPts val="200"/>
               </a:spcAft>
-              <a:defRPr sz="1300" b="1">
+              <a:defRPr sz="1250" b="1">
                 <a:solidFill>
                   <a:srgbClr val="1A365D"/>
                 </a:solidFill>
@@ -5936,9 +7040,9 @@
           <a:p>
             <a:pPr>
               <a:spcAft>
-                <a:spcPts val="1800"/>
-              </a:spcAft>
-              <a:defRPr sz="1100">
+                <a:spcPts val="1400"/>
+              </a:spcAft>
+              <a:defRPr sz="1050">
                 <a:solidFill>
                   <a:srgbClr val="282828"/>
                 </a:solidFill>
@@ -5953,7 +7057,7 @@
       </p:sp>
       <p:pic>
         <p:nvPicPr>
-          <p:cNvPr id="8" name="Picture 7" descr="comp2.jpeg"/>
+          <p:cNvPr id="9" name="Picture 8" descr="comp1.jpeg"/>
           <p:cNvPicPr>
             <a:picLocks noChangeAspect="1"/>
           </p:cNvPicPr>
@@ -5967,8 +7071,56 @@
         </p:blipFill>
         <p:spPr>
           <a:xfrm>
-            <a:off x="6217920" y="1645920"/>
-            <a:ext cx="5029200" cy="4023360"/>
+            <a:off x="6309360" y="1645920"/>
+            <a:ext cx="2194560" cy="1929384"/>
+          </a:xfrm>
+          <a:prstGeom prst="rect">
+            <a:avLst/>
+          </a:prstGeom>
+        </p:spPr>
+      </p:pic>
+      <p:pic>
+        <p:nvPicPr>
+          <p:cNvPr id="10" name="Picture 9" descr="comp2.jpeg"/>
+          <p:cNvPicPr>
+            <a:picLocks noChangeAspect="1"/>
+          </p:cNvPicPr>
+          <p:nvPr/>
+        </p:nvPicPr>
+        <p:blipFill>
+          <a:blip r:embed="rId3"/>
+          <a:stretch>
+            <a:fillRect/>
+          </a:stretch>
+        </p:blipFill>
+        <p:spPr>
+          <a:xfrm>
+            <a:off x="9052560" y="1645920"/>
+            <a:ext cx="2194560" cy="1591056"/>
+          </a:xfrm>
+          <a:prstGeom prst="rect">
+            <a:avLst/>
+          </a:prstGeom>
+        </p:spPr>
+      </p:pic>
+      <p:pic>
+        <p:nvPicPr>
+          <p:cNvPr id="11" name="Picture 10" descr="comp3.jpeg"/>
+          <p:cNvPicPr>
+            <a:picLocks noChangeAspect="1"/>
+          </p:cNvPicPr>
+          <p:nvPr/>
+        </p:nvPicPr>
+        <p:blipFill>
+          <a:blip r:embed="rId4"/>
+          <a:stretch>
+            <a:fillRect/>
+          </a:stretch>
+        </p:blipFill>
+        <p:spPr>
+          <a:xfrm>
+            <a:off x="6583680" y="3749039"/>
+            <a:ext cx="4389120" cy="2148840"/>
           </a:xfrm>
           <a:prstGeom prst="rect">
             <a:avLst/>
@@ -6047,9 +7199,7 @@
             <a:srgbClr val="1A365D"/>
           </a:solidFill>
           <a:ln>
-            <a:solidFill>
-              <a:srgbClr val="1A365D"/>
-            </a:solidFill>
+            <a:noFill/>
           </a:ln>
         </p:spPr>
         <p:style>
@@ -6092,9 +7242,7 @@
             <a:srgbClr val="DCDCDC"/>
           </a:solidFill>
           <a:ln>
-            <a:solidFill>
-              <a:srgbClr val="DCDCDC"/>
-            </a:solidFill>
+            <a:noFill/>
           </a:ln>
         </p:spPr>
         <p:style>
@@ -6186,21 +7334,64 @@
               </a:defRPr>
             </a:pPr>
             <a:r>
-              <a:t>Slide 5 of 11</a:t>
-            </a:r>
-          </a:p>
-        </p:txBody>
-      </p:sp>
-      <p:sp>
-        <p:nvSpPr>
-          <p:cNvPr id="7" name="TextBox 6"/>
+              <a:t>Slide 5 of 12</a:t>
+            </a:r>
+          </a:p>
+        </p:txBody>
+      </p:sp>
+      <p:sp>
+        <p:nvSpPr>
+          <p:cNvPr id="7" name="Rectangle 6"/>
+          <p:cNvSpPr/>
+          <p:nvPr/>
+        </p:nvSpPr>
+        <p:spPr>
+          <a:xfrm>
+            <a:off x="914400" y="1645920"/>
+            <a:ext cx="4663440" cy="4114800"/>
+          </a:xfrm>
+          <a:prstGeom prst="rect">
+            <a:avLst/>
+          </a:prstGeom>
+          <a:solidFill>
+            <a:srgbClr val="F8FAFC"/>
+          </a:solidFill>
+          <a:ln>
+            <a:noFill/>
+          </a:ln>
+        </p:spPr>
+        <p:style>
+          <a:lnRef idx="1">
+            <a:schemeClr val="accent1"/>
+          </a:lnRef>
+          <a:fillRef idx="3">
+            <a:schemeClr val="accent1"/>
+          </a:fillRef>
+          <a:effectRef idx="2">
+            <a:schemeClr val="accent1"/>
+          </a:effectRef>
+          <a:fontRef idx="minor">
+            <a:schemeClr val="lt1"/>
+          </a:fontRef>
+        </p:style>
+        <p:txBody>
+          <a:bodyPr rtlCol="0" anchor="ctr"/>
+          <a:lstStyle/>
+          <a:p>
+            <a:pPr algn="ctr"/>
+          </a:p>
+        </p:txBody>
+      </p:sp>
+      <p:sp>
+        <p:nvSpPr>
+          <p:cNvPr id="8" name="TextBox 7"/>
           <p:cNvSpPr txBox="1"/>
           <p:nvPr/>
         </p:nvSpPr>
         <p:spPr>
           <a:xfrm>
-            <a:off x="914400" y="1645920"/>
-            <a:ext cx="4754880" cy="4114800"/>
+            <a:off x="1051560" y="1783080"/>
+            <a:ext cx="4389120" cy="3840480"/>
           </a:xfrm>
           <a:prstGeom prst="rect">
             <a:avLst/>
@@ -6217,7 +7408,7 @@
               <a:spcAft>
                 <a:spcPts val="200"/>
               </a:spcAft>
-              <a:defRPr sz="1300" b="1">
+              <a:defRPr sz="1250" b="1">
                 <a:solidFill>
                   <a:srgbClr val="1A365D"/>
                 </a:solidFill>
@@ -6231,9 +7422,9 @@
           <a:p>
             <a:pPr>
               <a:spcAft>
-                <a:spcPts val="1800"/>
-              </a:spcAft>
-              <a:defRPr sz="1100">
+                <a:spcPts val="1400"/>
+              </a:spcAft>
+              <a:defRPr sz="1050">
                 <a:solidFill>
                   <a:srgbClr val="282828"/>
                 </a:solidFill>
@@ -6249,7 +7440,7 @@
               <a:spcAft>
                 <a:spcPts val="200"/>
               </a:spcAft>
-              <a:defRPr sz="1300" b="1">
+              <a:defRPr sz="1250" b="1">
                 <a:solidFill>
                   <a:srgbClr val="1A365D"/>
                 </a:solidFill>
@@ -6263,9 +7454,9 @@
           <a:p>
             <a:pPr>
               <a:spcAft>
-                <a:spcPts val="1800"/>
-              </a:spcAft>
-              <a:defRPr sz="1100">
+                <a:spcPts val="1400"/>
+              </a:spcAft>
+              <a:defRPr sz="1050">
                 <a:solidFill>
                   <a:srgbClr val="282828"/>
                 </a:solidFill>
@@ -6281,7 +7472,7 @@
               <a:spcAft>
                 <a:spcPts val="200"/>
               </a:spcAft>
-              <a:defRPr sz="1300" b="1">
+              <a:defRPr sz="1250" b="1">
                 <a:solidFill>
                   <a:srgbClr val="1A365D"/>
                 </a:solidFill>
@@ -6295,9 +7486,9 @@
           <a:p>
             <a:pPr>
               <a:spcAft>
-                <a:spcPts val="1800"/>
-              </a:spcAft>
-              <a:defRPr sz="1100">
+                <a:spcPts val="1400"/>
+              </a:spcAft>
+              <a:defRPr sz="1050">
                 <a:solidFill>
                   <a:srgbClr val="282828"/>
                 </a:solidFill>
@@ -6312,7 +7503,7 @@
       </p:sp>
       <p:pic>
         <p:nvPicPr>
-          <p:cNvPr id="8" name="Picture 7" descr="comp4.jpeg"/>
+          <p:cNvPr id="9" name="Picture 8" descr="comp4.jpeg"/>
           <p:cNvPicPr>
             <a:picLocks noChangeAspect="1"/>
           </p:cNvPicPr>
@@ -6326,8 +7517,32 @@
         </p:blipFill>
         <p:spPr>
           <a:xfrm>
-            <a:off x="6217920" y="1645920"/>
-            <a:ext cx="5029200" cy="4023360"/>
+            <a:off x="6309360" y="2414016"/>
+            <a:ext cx="2194560" cy="2578608"/>
+          </a:xfrm>
+          <a:prstGeom prst="rect">
+            <a:avLst/>
+          </a:prstGeom>
+        </p:spPr>
+      </p:pic>
+      <p:pic>
+        <p:nvPicPr>
+          <p:cNvPr id="10" name="Picture 9" descr="bo-motor.jpeg"/>
+          <p:cNvPicPr>
+            <a:picLocks noChangeAspect="1"/>
+          </p:cNvPicPr>
+          <p:nvPr/>
+        </p:nvPicPr>
+        <p:blipFill>
+          <a:blip r:embed="rId3"/>
+          <a:stretch>
+            <a:fillRect/>
+          </a:stretch>
+        </p:blipFill>
+        <p:spPr>
+          <a:xfrm>
+            <a:off x="8869680" y="2752344"/>
+            <a:ext cx="2377440" cy="1892807"/>
           </a:xfrm>
           <a:prstGeom prst="rect">
             <a:avLst/>
@@ -6406,9 +7621,7 @@
             <a:srgbClr val="1A365D"/>
           </a:solidFill>
           <a:ln>
-            <a:solidFill>
-              <a:srgbClr val="1A365D"/>
-            </a:solidFill>
+            <a:noFill/>
           </a:ln>
         </p:spPr>
         <p:style>
@@ -6451,9 +7664,7 @@
             <a:srgbClr val="DCDCDC"/>
           </a:solidFill>
           <a:ln>
-            <a:solidFill>
-              <a:srgbClr val="DCDCDC"/>
-            </a:solidFill>
+            <a:noFill/>
           </a:ln>
         </p:spPr>
         <p:style>
@@ -6545,21 +7756,64 @@
               </a:defRPr>
             </a:pPr>
             <a:r>
-              <a:t>Slide 6 of 11</a:t>
-            </a:r>
-          </a:p>
-        </p:txBody>
-      </p:sp>
-      <p:sp>
-        <p:nvSpPr>
-          <p:cNvPr id="7" name="TextBox 6"/>
+              <a:t>Slide 6 of 12</a:t>
+            </a:r>
+          </a:p>
+        </p:txBody>
+      </p:sp>
+      <p:sp>
+        <p:nvSpPr>
+          <p:cNvPr id="7" name="Rectangle 6"/>
+          <p:cNvSpPr/>
+          <p:nvPr/>
+        </p:nvSpPr>
+        <p:spPr>
+          <a:xfrm>
+            <a:off x="914400" y="1645920"/>
+            <a:ext cx="4663440" cy="4114800"/>
+          </a:xfrm>
+          <a:prstGeom prst="rect">
+            <a:avLst/>
+          </a:prstGeom>
+          <a:solidFill>
+            <a:srgbClr val="F8FAFC"/>
+          </a:solidFill>
+          <a:ln>
+            <a:noFill/>
+          </a:ln>
+        </p:spPr>
+        <p:style>
+          <a:lnRef idx="1">
+            <a:schemeClr val="accent1"/>
+          </a:lnRef>
+          <a:fillRef idx="3">
+            <a:schemeClr val="accent1"/>
+          </a:fillRef>
+          <a:effectRef idx="2">
+            <a:schemeClr val="accent1"/>
+          </a:effectRef>
+          <a:fontRef idx="minor">
+            <a:schemeClr val="lt1"/>
+          </a:fontRef>
+        </p:style>
+        <p:txBody>
+          <a:bodyPr rtlCol="0" anchor="ctr"/>
+          <a:lstStyle/>
+          <a:p>
+            <a:pPr algn="ctr"/>
+          </a:p>
+        </p:txBody>
+      </p:sp>
+      <p:sp>
+        <p:nvSpPr>
+          <p:cNvPr id="8" name="TextBox 7"/>
           <p:cNvSpPr txBox="1"/>
           <p:nvPr/>
         </p:nvSpPr>
         <p:spPr>
           <a:xfrm>
-            <a:off x="914400" y="1645920"/>
-            <a:ext cx="10332720" cy="4114800"/>
+            <a:off x="1051560" y="1783080"/>
+            <a:ext cx="4389120" cy="3840480"/>
           </a:xfrm>
           <a:prstGeom prst="rect">
             <a:avLst/>
@@ -6576,7 +7830,7 @@
               <a:spcAft>
                 <a:spcPts val="200"/>
               </a:spcAft>
-              <a:defRPr sz="1300" b="1">
+              <a:defRPr sz="1250" b="1">
                 <a:solidFill>
                   <a:srgbClr val="1A365D"/>
                 </a:solidFill>
@@ -6592,7 +7846,7 @@
               <a:spcAft>
                 <a:spcPts val="1600"/>
               </a:spcAft>
-              <a:defRPr sz="1100">
+              <a:defRPr sz="1050">
                 <a:solidFill>
                   <a:srgbClr val="282828"/>
                 </a:solidFill>
@@ -6600,7 +7854,7 @@
               </a:defRPr>
             </a:pPr>
             <a:r>
-              <a:t>DC motors draw high starting currents, which drop the battery voltage and cause microcontroller resets. To prevent this, the power rails are separated. The 7.4V battery pack connects directly to the L298N driver, while the driver's onboard 5V regulator steps it down to power the Arduino UNO.</a:t>
+              <a:t>DC motors draw high starting currents, which drop the battery voltage and cause microcontroller resets. To prevent this, the power rails are separated. The 7.4V battery pack connects directly to the L298N driver, while the driver's onboard 5V regulator steps down the voltage to power the Arduino UNO.</a:t>
             </a:r>
           </a:p>
           <a:p>
@@ -6608,7 +7862,7 @@
               <a:spcAft>
                 <a:spcPts val="200"/>
               </a:spcAft>
-              <a:defRPr sz="1300" b="1">
+              <a:defRPr sz="1250" b="1">
                 <a:solidFill>
                   <a:srgbClr val="1A365D"/>
                 </a:solidFill>
@@ -6616,6 +7870,104 @@
               </a:defRPr>
             </a:pPr>
             <a:r>
+              <a:t>Unified Battery Supply Reference</a:t>
+            </a:r>
+          </a:p>
+          <a:p>
+            <a:pPr>
+              <a:spcAft>
+                <a:spcPts val="1600"/>
+              </a:spcAft>
+              <a:defRPr sz="1050">
+                <a:solidFill>
+                  <a:srgbClr val="282828"/>
+                </a:solidFill>
+                <a:latin typeface="Arial"/>
+              </a:defRPr>
+            </a:pPr>
+            <a:r>
+              <a:t>Tying the grounds of the battery, Arduino, and L298N driver together is essential to establish a common electrical reference voltage for the PWM control signals.</a:t>
+            </a:r>
+          </a:p>
+        </p:txBody>
+      </p:sp>
+      <p:sp>
+        <p:nvSpPr>
+          <p:cNvPr id="9" name="Rectangle 8"/>
+          <p:cNvSpPr/>
+          <p:nvPr/>
+        </p:nvSpPr>
+        <p:spPr>
+          <a:xfrm>
+            <a:off x="6309360" y="1645920"/>
+            <a:ext cx="4937760" cy="4114800"/>
+          </a:xfrm>
+          <a:prstGeom prst="rect">
+            <a:avLst/>
+          </a:prstGeom>
+          <a:solidFill>
+            <a:srgbClr val="F8FAFC"/>
+          </a:solidFill>
+          <a:ln>
+            <a:noFill/>
+          </a:ln>
+        </p:spPr>
+        <p:style>
+          <a:lnRef idx="1">
+            <a:schemeClr val="accent1"/>
+          </a:lnRef>
+          <a:fillRef idx="3">
+            <a:schemeClr val="accent1"/>
+          </a:fillRef>
+          <a:effectRef idx="2">
+            <a:schemeClr val="accent1"/>
+          </a:effectRef>
+          <a:fontRef idx="minor">
+            <a:schemeClr val="lt1"/>
+          </a:fontRef>
+        </p:style>
+        <p:txBody>
+          <a:bodyPr rtlCol="0" anchor="ctr"/>
+          <a:lstStyle/>
+          <a:p>
+            <a:pPr algn="ctr"/>
+          </a:p>
+        </p:txBody>
+      </p:sp>
+      <p:sp>
+        <p:nvSpPr>
+          <p:cNvPr id="10" name="TextBox 9"/>
+          <p:cNvSpPr txBox="1"/>
+          <p:nvPr/>
+        </p:nvSpPr>
+        <p:spPr>
+          <a:xfrm>
+            <a:off x="6446520" y="1783080"/>
+            <a:ext cx="4663440" cy="3840480"/>
+          </a:xfrm>
+          <a:prstGeom prst="rect">
+            <a:avLst/>
+          </a:prstGeom>
+          <a:noFill/>
+        </p:spPr>
+        <p:txBody>
+          <a:bodyPr wrap="square" lIns="0" rIns="0" tIns="0" bIns="0">
+            <a:spAutoFit/>
+          </a:bodyPr>
+          <a:lstStyle/>
+          <a:p>
+            <a:pPr>
+              <a:spcAft>
+                <a:spcPts val="200"/>
+              </a:spcAft>
+              <a:defRPr sz="1250" b="1">
+                <a:solidFill>
+                  <a:srgbClr val="1A365D"/>
+                </a:solidFill>
+                <a:latin typeface="Arial"/>
+              </a:defRPr>
+            </a:pPr>
+            <a:r>
               <a:t>Microcontroller Resets and Brownouts</a:t>
             </a:r>
           </a:p>
@@ -6624,7 +7976,7 @@
               <a:spcAft>
                 <a:spcPts val="1600"/>
               </a:spcAft>
-              <a:defRPr sz="1100">
+              <a:defRPr sz="1050">
                 <a:solidFill>
                   <a:srgbClr val="282828"/>
                 </a:solidFill>
@@ -6632,7 +7984,7 @@
               </a:defRPr>
             </a:pPr>
             <a:r>
-              <a:t>Initial prototype builds included a 0.96-inch SSD1306 OLED display and an SG90 micro servo motor. During active scans, the servo's high current load caused significant voltage drops (brownouts) on the 5V line, resetting the microcontroller and introducing sensor noise.</a:t>
+              <a:t>Initial prototype builds integrated a servo motor and OLED display. During active scans, the servo's high current load caused significant voltage drops (brownouts) on the 5V line, resetting the microcontroller and introducing sensor noise.</a:t>
             </a:r>
           </a:p>
           <a:p>
@@ -6640,7 +7992,7 @@
               <a:spcAft>
                 <a:spcPts val="200"/>
               </a:spcAft>
-              <a:defRPr sz="1300" b="1">
+              <a:defRPr sz="1250" b="1">
                 <a:solidFill>
                   <a:srgbClr val="1A365D"/>
                 </a:solidFill>
@@ -6656,7 +8008,7 @@
               <a:spcAft>
                 <a:spcPts val="1600"/>
               </a:spcAft>
-              <a:defRPr sz="1100">
+              <a:defRPr sz="1050">
                 <a:solidFill>
                   <a:srgbClr val="282828"/>
                 </a:solidFill>
@@ -6664,7 +8016,7 @@
               </a:defRPr>
             </a:pPr>
             <a:r>
-              <a:t>To ensure stable, reliable operation on a single battery power source, the OLED display and servo motor were excluded from the final deployed prototype. The grounds of the battery, Arduino, and motor driver are connected to establish a shared reference.</a:t>
+              <a:t>To ensure stable and continuous operation, the servo motor and OLED display were excluded from the final deployed prototype. This power split ensures that motor current spikes do not affect microcontroller logic rails.</a:t>
             </a:r>
           </a:p>
         </p:txBody>
@@ -6741,9 +8093,7 @@
             <a:srgbClr val="1A365D"/>
           </a:solidFill>
           <a:ln>
-            <a:solidFill>
-              <a:srgbClr val="1A365D"/>
-            </a:solidFill>
+            <a:noFill/>
           </a:ln>
         </p:spPr>
         <p:style>
@@ -6786,9 +8136,7 @@
             <a:srgbClr val="DCDCDC"/>
           </a:solidFill>
           <a:ln>
-            <a:solidFill>
-              <a:srgbClr val="DCDCDC"/>
-            </a:solidFill>
+            <a:noFill/>
           </a:ln>
         </p:spPr>
         <p:style>
@@ -6880,21 +8228,64 @@
               </a:defRPr>
             </a:pPr>
             <a:r>
-              <a:t>Slide 7 of 11</a:t>
-            </a:r>
-          </a:p>
-        </p:txBody>
-      </p:sp>
-      <p:sp>
-        <p:nvSpPr>
-          <p:cNvPr id="7" name="TextBox 6"/>
+              <a:t>Slide 7 of 12</a:t>
+            </a:r>
+          </a:p>
+        </p:txBody>
+      </p:sp>
+      <p:sp>
+        <p:nvSpPr>
+          <p:cNvPr id="7" name="Rectangle 6"/>
+          <p:cNvSpPr/>
+          <p:nvPr/>
+        </p:nvSpPr>
+        <p:spPr>
+          <a:xfrm>
+            <a:off x="914400" y="1645920"/>
+            <a:ext cx="4663440" cy="4114800"/>
+          </a:xfrm>
+          <a:prstGeom prst="rect">
+            <a:avLst/>
+          </a:prstGeom>
+          <a:solidFill>
+            <a:srgbClr val="F8FAFC"/>
+          </a:solidFill>
+          <a:ln>
+            <a:noFill/>
+          </a:ln>
+        </p:spPr>
+        <p:style>
+          <a:lnRef idx="1">
+            <a:schemeClr val="accent1"/>
+          </a:lnRef>
+          <a:fillRef idx="3">
+            <a:schemeClr val="accent1"/>
+          </a:fillRef>
+          <a:effectRef idx="2">
+            <a:schemeClr val="accent1"/>
+          </a:effectRef>
+          <a:fontRef idx="minor">
+            <a:schemeClr val="lt1"/>
+          </a:fontRef>
+        </p:style>
+        <p:txBody>
+          <a:bodyPr rtlCol="0" anchor="ctr"/>
+          <a:lstStyle/>
+          <a:p>
+            <a:pPr algn="ctr"/>
+          </a:p>
+        </p:txBody>
+      </p:sp>
+      <p:sp>
+        <p:nvSpPr>
+          <p:cNvPr id="8" name="TextBox 7"/>
           <p:cNvSpPr txBox="1"/>
           <p:nvPr/>
         </p:nvSpPr>
         <p:spPr>
           <a:xfrm>
-            <a:off x="914400" y="1645920"/>
-            <a:ext cx="4754880" cy="4114800"/>
+            <a:off x="1051560" y="1783080"/>
+            <a:ext cx="4389120" cy="3840480"/>
           </a:xfrm>
           <a:prstGeom prst="rect">
             <a:avLst/>
@@ -6911,7 +8302,7 @@
               <a:spcAft>
                 <a:spcPts val="200"/>
               </a:spcAft>
-              <a:defRPr sz="1300" b="1">
+              <a:defRPr sz="1250" b="1">
                 <a:solidFill>
                   <a:srgbClr val="1A365D"/>
                 </a:solidFill>
@@ -6925,9 +8316,9 @@
           <a:p>
             <a:pPr>
               <a:spcAft>
-                <a:spcPts val="1800"/>
-              </a:spcAft>
-              <a:defRPr sz="1100">
+                <a:spcPts val="1400"/>
+              </a:spcAft>
+              <a:defRPr sz="1050">
                 <a:solidFill>
                   <a:srgbClr val="282828"/>
                 </a:solidFill>
@@ -6943,7 +8334,7 @@
               <a:spcAft>
                 <a:spcPts val="200"/>
               </a:spcAft>
-              <a:defRPr sz="1300" b="1">
+              <a:defRPr sz="1250" b="1">
                 <a:solidFill>
                   <a:srgbClr val="1A365D"/>
                 </a:solidFill>
@@ -6957,9 +8348,9 @@
           <a:p>
             <a:pPr>
               <a:spcAft>
-                <a:spcPts val="1800"/>
-              </a:spcAft>
-              <a:defRPr sz="1100">
+                <a:spcPts val="1400"/>
+              </a:spcAft>
+              <a:defRPr sz="1050">
                 <a:solidFill>
                   <a:srgbClr val="282828"/>
                 </a:solidFill>
@@ -6975,7 +8366,7 @@
               <a:spcAft>
                 <a:spcPts val="200"/>
               </a:spcAft>
-              <a:defRPr sz="1300" b="1">
+              <a:defRPr sz="1250" b="1">
                 <a:solidFill>
                   <a:srgbClr val="1A365D"/>
                 </a:solidFill>
@@ -6989,9 +8380,9 @@
           <a:p>
             <a:pPr>
               <a:spcAft>
-                <a:spcPts val="1800"/>
-              </a:spcAft>
-              <a:defRPr sz="1100">
+                <a:spcPts val="1400"/>
+              </a:spcAft>
+              <a:defRPr sz="1050">
                 <a:solidFill>
                   <a:srgbClr val="282828"/>
                 </a:solidFill>
@@ -7006,7 +8397,7 @@
       </p:sp>
       <p:pic>
         <p:nvPicPr>
-          <p:cNvPr id="8" name="Picture 7" descr="img2.jpeg"/>
+          <p:cNvPr id="9" name="Picture 8" descr="img2.jpeg"/>
           <p:cNvPicPr>
             <a:picLocks noChangeAspect="1"/>
           </p:cNvPicPr>
@@ -7020,8 +8411,8 @@
         </p:blipFill>
         <p:spPr>
           <a:xfrm>
-            <a:off x="6217920" y="1645920"/>
-            <a:ext cx="5029200" cy="4023360"/>
+            <a:off x="6309360" y="1847088"/>
+            <a:ext cx="4937760" cy="3703320"/>
           </a:xfrm>
           <a:prstGeom prst="rect">
             <a:avLst/>
@@ -7100,9 +8491,7 @@
             <a:srgbClr val="1A365D"/>
           </a:solidFill>
           <a:ln>
-            <a:solidFill>
-              <a:srgbClr val="1A365D"/>
-            </a:solidFill>
+            <a:noFill/>
           </a:ln>
         </p:spPr>
         <p:style>
@@ -7145,9 +8534,7 @@
             <a:srgbClr val="DCDCDC"/>
           </a:solidFill>
           <a:ln>
-            <a:solidFill>
-              <a:srgbClr val="DCDCDC"/>
-            </a:solidFill>
+            <a:noFill/>
           </a:ln>
         </p:spPr>
         <p:style>
@@ -7239,21 +8626,64 @@
               </a:defRPr>
             </a:pPr>
             <a:r>
-              <a:t>Slide 8 of 11</a:t>
-            </a:r>
-          </a:p>
-        </p:txBody>
-      </p:sp>
-      <p:sp>
-        <p:nvSpPr>
-          <p:cNvPr id="7" name="TextBox 6"/>
+              <a:t>Slide 8 of 12</a:t>
+            </a:r>
+          </a:p>
+        </p:txBody>
+      </p:sp>
+      <p:sp>
+        <p:nvSpPr>
+          <p:cNvPr id="7" name="Rectangle 6"/>
+          <p:cNvSpPr/>
+          <p:nvPr/>
+        </p:nvSpPr>
+        <p:spPr>
+          <a:xfrm>
+            <a:off x="914400" y="1645920"/>
+            <a:ext cx="4114800" cy="4114800"/>
+          </a:xfrm>
+          <a:prstGeom prst="rect">
+            <a:avLst/>
+          </a:prstGeom>
+          <a:solidFill>
+            <a:srgbClr val="F8FAFC"/>
+          </a:solidFill>
+          <a:ln>
+            <a:noFill/>
+          </a:ln>
+        </p:spPr>
+        <p:style>
+          <a:lnRef idx="1">
+            <a:schemeClr val="accent1"/>
+          </a:lnRef>
+          <a:fillRef idx="3">
+            <a:schemeClr val="accent1"/>
+          </a:fillRef>
+          <a:effectRef idx="2">
+            <a:schemeClr val="accent1"/>
+          </a:effectRef>
+          <a:fontRef idx="minor">
+            <a:schemeClr val="lt1"/>
+          </a:fontRef>
+        </p:style>
+        <p:txBody>
+          <a:bodyPr rtlCol="0" anchor="ctr"/>
+          <a:lstStyle/>
+          <a:p>
+            <a:pPr algn="ctr"/>
+          </a:p>
+        </p:txBody>
+      </p:sp>
+      <p:sp>
+        <p:nvSpPr>
+          <p:cNvPr id="8" name="TextBox 7"/>
           <p:cNvSpPr txBox="1"/>
           <p:nvPr/>
         </p:nvSpPr>
         <p:spPr>
           <a:xfrm>
-            <a:off x="914400" y="1645920"/>
-            <a:ext cx="4389120" cy="4114800"/>
+            <a:off x="1051560" y="1783080"/>
+            <a:ext cx="3840480" cy="3840480"/>
           </a:xfrm>
           <a:prstGeom prst="rect">
             <a:avLst/>
@@ -7284,9 +8714,9 @@
           <a:p>
             <a:pPr>
               <a:spcAft>
-                <a:spcPts val="2000"/>
-              </a:spcAft>
-              <a:defRPr sz="1050">
+                <a:spcPts val="1600"/>
+              </a:spcAft>
+              <a:defRPr sz="1000">
                 <a:solidFill>
                   <a:srgbClr val="282828"/>
                 </a:solidFill>
@@ -7294,7 +8724,7 @@
               </a:defRPr>
             </a:pPr>
             <a:r>
-              <a:t>The main loop reads ultrasonic distance and flank IR sensors to trigger appropriate motor actions.</a:t>
+              <a:t>The main loop reads ultrasonic distance and flank IR sensors to determine motor actions in real-time.</a:t>
             </a:r>
           </a:p>
           <a:p>
@@ -7316,9 +8746,9 @@
           <a:p>
             <a:pPr>
               <a:spcAft>
-                <a:spcPts val="2000"/>
-              </a:spcAft>
-              <a:defRPr sz="1050">
+                <a:spcPts val="1600"/>
+              </a:spcAft>
+              <a:defRPr sz="1000">
                 <a:solidFill>
                   <a:srgbClr val="282828"/>
                 </a:solidFill>
@@ -7342,15 +8772,15 @@
               </a:defRPr>
             </a:pPr>
             <a:r>
-              <a:t>Target Searching</a:t>
-            </a:r>
-          </a:p>
-          <a:p>
-            <a:pPr>
-              <a:spcAft>
-                <a:spcPts val="2000"/>
-              </a:spcAft>
-              <a:defRPr sz="1050">
+              <a:t>Rotating Search State</a:t>
+            </a:r>
+          </a:p>
+          <a:p>
+            <a:pPr>
+              <a:spcAft>
+                <a:spcPts val="1600"/>
+              </a:spcAft>
+              <a:defRPr sz="1000">
                 <a:solidFill>
                   <a:srgbClr val="282828"/>
                 </a:solidFill>
@@ -7365,14 +8795,14 @@
       </p:sp>
       <p:sp>
         <p:nvSpPr>
-          <p:cNvPr id="8" name="Rectangle 7"/>
+          <p:cNvPr id="9" name="Rectangle 8"/>
           <p:cNvSpPr/>
           <p:nvPr/>
         </p:nvSpPr>
         <p:spPr>
           <a:xfrm>
-            <a:off x="5669280" y="1645920"/>
-            <a:ext cx="5760720" cy="4114800"/>
+            <a:off x="5303520" y="1645920"/>
+            <a:ext cx="5943600" cy="4114800"/>
           </a:xfrm>
           <a:prstGeom prst="rect">
             <a:avLst/>
